--- a/포스터/Mars-Fit_포스터.pptx
+++ b/포스터/Mars-Fit_포스터.pptx
@@ -3960,7 +3960,7 @@
         <p:spPr>
           <a:xfrm>
             <a:off x="432000" y="11946623"/>
-            <a:ext cx="15408000" cy="11751782"/>
+            <a:ext cx="15408000" cy="12687782"/>
           </a:xfrm>
           <a:prstGeom prst="roundRect">
             <a:avLst>
@@ -4510,7 +4510,7 @@
         <p:spPr>
           <a:xfrm>
             <a:off x="1728000" y="13762823"/>
-            <a:ext cx="5910572" cy="7416000"/>
+            <a:ext cx="6656567" cy="8352000"/>
           </a:xfrm>
           <a:prstGeom prst="rect">
             <a:avLst/>
@@ -4526,7 +4526,7 @@
         <p:spPr>
           <a:xfrm>
             <a:off x="1728000" y="13762823"/>
-            <a:ext cx="5910572" cy="7416000"/>
+            <a:ext cx="6656567" cy="8352000"/>
           </a:xfrm>
           <a:prstGeom prst="rect">
             <a:avLst/>
@@ -4577,8 +4577,8 @@
         </p:blipFill>
         <p:spPr>
           <a:xfrm>
-            <a:off x="8430572" y="13762823"/>
-            <a:ext cx="3785654" cy="7416000"/>
+            <a:off x="9176567" y="13762823"/>
+            <a:ext cx="4263455" cy="8352000"/>
           </a:xfrm>
           <a:prstGeom prst="rect">
             <a:avLst/>
@@ -4593,8 +4593,8 @@
         </p:nvSpPr>
         <p:spPr>
           <a:xfrm>
-            <a:off x="8430572" y="13762823"/>
-            <a:ext cx="3785654" cy="7416000"/>
+            <a:off x="9176567" y="13762823"/>
+            <a:ext cx="4263455" cy="8352000"/>
           </a:xfrm>
           <a:prstGeom prst="rect">
             <a:avLst/>
@@ -4637,8 +4637,8 @@
         </p:nvSpPr>
         <p:spPr>
           <a:xfrm>
-            <a:off x="1728000" y="21286823"/>
-            <a:ext cx="5910572" cy="504000"/>
+            <a:off x="1728000" y="22222823"/>
+            <a:ext cx="6656567" cy="504000"/>
           </a:xfrm>
           <a:prstGeom prst="rect">
             <a:avLst/>
@@ -4676,8 +4676,8 @@
         </p:nvSpPr>
         <p:spPr>
           <a:xfrm>
-            <a:off x="8430572" y="21286823"/>
-            <a:ext cx="3785654" cy="504000"/>
+            <a:off x="9176567" y="22222823"/>
+            <a:ext cx="4263455" cy="504000"/>
           </a:xfrm>
           <a:prstGeom prst="rect">
             <a:avLst/>
@@ -4715,7 +4715,7 @@
         </p:nvSpPr>
         <p:spPr>
           <a:xfrm>
-            <a:off x="936000" y="22042823"/>
+            <a:off x="936000" y="22978823"/>
             <a:ext cx="14400000" cy="1151582"/>
           </a:xfrm>
           <a:prstGeom prst="rect">
@@ -4757,14 +4757,14 @@
       </p:sp>
       <p:sp>
         <p:nvSpPr>
-          <p:cNvPr id="58" name="Rounded Rectangle 57"/>
+          <p:cNvPr id="74" name="Rounded Rectangle 73"/>
           <p:cNvSpPr/>
           <p:nvPr/>
         </p:nvSpPr>
         <p:spPr>
           <a:xfrm>
-            <a:off x="432000" y="24546206"/>
-            <a:ext cx="15408000" cy="16907247"/>
+            <a:off x="432000" y="25482206"/>
+            <a:ext cx="15408000" cy="15771102"/>
           </a:xfrm>
           <a:prstGeom prst="roundRect">
             <a:avLst>
@@ -4805,13 +4805,13 @@
       </p:sp>
       <p:sp>
         <p:nvSpPr>
-          <p:cNvPr id="59" name="Rounded Rectangle 58"/>
+          <p:cNvPr id="75" name="Rounded Rectangle 74"/>
           <p:cNvSpPr/>
           <p:nvPr/>
         </p:nvSpPr>
         <p:spPr>
           <a:xfrm>
-            <a:off x="720000" y="24130406"/>
+            <a:off x="720000" y="25066406"/>
             <a:ext cx="7776000" cy="756000"/>
           </a:xfrm>
           <a:prstGeom prst="roundRect">
@@ -4866,7 +4866,7 @@
         </p:nvSpPr>
         <p:spPr>
           <a:xfrm>
-            <a:off x="936000" y="25210406"/>
+            <a:off x="936000" y="26146406"/>
             <a:ext cx="14400000" cy="767721"/>
           </a:xfrm>
           <a:prstGeom prst="rect">
@@ -4914,7 +4914,7 @@
         </p:nvSpPr>
         <p:spPr>
           <a:xfrm>
-            <a:off x="936000" y="26266127"/>
+            <a:off x="936000" y="27202127"/>
             <a:ext cx="14400000" cy="1152000"/>
           </a:xfrm>
           <a:prstGeom prst="roundRect">
@@ -4960,7 +4960,7 @@
         </p:nvSpPr>
         <p:spPr>
           <a:xfrm>
-            <a:off x="1152000" y="26446127"/>
+            <a:off x="1152000" y="27382127"/>
             <a:ext cx="13968000" cy="864000"/>
           </a:xfrm>
           <a:prstGeom prst="rect">
@@ -5018,7 +5018,7 @@
         </p:nvSpPr>
         <p:spPr>
           <a:xfrm>
-            <a:off x="936000" y="27706127"/>
+            <a:off x="936000" y="28642127"/>
             <a:ext cx="14400000" cy="908121"/>
           </a:xfrm>
           <a:prstGeom prst="roundRect">
@@ -5064,7 +5064,7 @@
         </p:nvSpPr>
         <p:spPr>
           <a:xfrm>
-            <a:off x="1188000" y="27886127"/>
+            <a:off x="1188000" y="28822127"/>
             <a:ext cx="13896000" cy="548121"/>
           </a:xfrm>
           <a:prstGeom prst="rect">
@@ -5095,9 +5095,861 @@
           </a:p>
         </p:txBody>
       </p:sp>
+      <p:sp>
+        <p:nvSpPr>
+          <p:cNvPr id="45" name="Rounded Rectangle 44"/>
+          <p:cNvSpPr/>
+          <p:nvPr/>
+        </p:nvSpPr>
+        <p:spPr>
+          <a:xfrm>
+            <a:off x="936000" y="29910249"/>
+            <a:ext cx="14400000" cy="540000"/>
+          </a:xfrm>
+          <a:prstGeom prst="roundRect">
+            <a:avLst>
+              <a:gd name="adj" fmla="val 14000"/>
+            </a:avLst>
+          </a:prstGeom>
+          <a:solidFill>
+            <a:srgbClr val="003670"/>
+          </a:solidFill>
+          <a:ln>
+            <a:noFill/>
+          </a:ln>
+          <a:effectLst/>
+        </p:spPr>
+        <p:style>
+          <a:lnRef idx="1">
+            <a:schemeClr val="accent1"/>
+          </a:lnRef>
+          <a:fillRef idx="3">
+            <a:schemeClr val="accent1"/>
+          </a:fillRef>
+          <a:effectRef idx="2">
+            <a:schemeClr val="accent1"/>
+          </a:effectRef>
+          <a:fontRef idx="minor">
+            <a:schemeClr val="lt1"/>
+          </a:fontRef>
+        </p:style>
+        <p:txBody>
+          <a:bodyPr rtlCol="0" anchor="ctr"/>
+          <a:lstStyle/>
+          <a:p>
+            <a:pPr algn="ctr"/>
+          </a:p>
+        </p:txBody>
+      </p:sp>
+      <p:sp>
+        <p:nvSpPr>
+          <p:cNvPr id="46" name="TextBox 45"/>
+          <p:cNvSpPr txBox="1"/>
+          <p:nvPr/>
+        </p:nvSpPr>
+        <p:spPr>
+          <a:xfrm>
+            <a:off x="1116000" y="30039849"/>
+            <a:ext cx="2448000" cy="360000"/>
+          </a:xfrm>
+          <a:prstGeom prst="rect">
+            <a:avLst/>
+          </a:prstGeom>
+          <a:noFill/>
+        </p:spPr>
+        <p:txBody>
+          <a:bodyPr wrap="square" lIns="0" rIns="0" tIns="0" bIns="0">
+            <a:spAutoFit/>
+          </a:bodyPr>
+          <a:lstStyle/>
+          <a:p>
+            <a:pPr algn="ctr">
+              <a:lnSpc>
+                <a:spcPct val="124000"/>
+              </a:lnSpc>
+            </a:pPr>
+            <a:r>
+              <a:rPr sz="1952" b="0">
+                <a:solidFill>
+                  <a:srgbClr val="C7D4E6"/>
+                </a:solidFill>
+                <a:latin typeface="맑은 고딕"/>
+              </a:rPr>
+              <a:t>판정</a:t>
+            </a:r>
+          </a:p>
+        </p:txBody>
+      </p:sp>
+      <p:sp>
+        <p:nvSpPr>
+          <p:cNvPr id="47" name="TextBox 46"/>
+          <p:cNvSpPr txBox="1"/>
+          <p:nvPr/>
+        </p:nvSpPr>
+        <p:spPr>
+          <a:xfrm>
+            <a:off x="3924000" y="30039849"/>
+            <a:ext cx="6696000" cy="360000"/>
+          </a:xfrm>
+          <a:prstGeom prst="rect">
+            <a:avLst/>
+          </a:prstGeom>
+          <a:noFill/>
+        </p:spPr>
+        <p:txBody>
+          <a:bodyPr wrap="square" lIns="0" rIns="0" tIns="0" bIns="0">
+            <a:spAutoFit/>
+          </a:bodyPr>
+          <a:lstStyle/>
+          <a:p>
+            <a:pPr algn="l">
+              <a:lnSpc>
+                <a:spcPct val="124000"/>
+              </a:lnSpc>
+            </a:pPr>
+            <a:r>
+              <a:rPr sz="1952" b="0">
+                <a:solidFill>
+                  <a:srgbClr val="C7D4E6"/>
+                </a:solidFill>
+                <a:latin typeface="맑은 고딕"/>
+              </a:rPr>
+              <a:t>무슨 뜻인가</a:t>
+            </a:r>
+          </a:p>
+        </p:txBody>
+      </p:sp>
+      <p:sp>
+        <p:nvSpPr>
+          <p:cNvPr id="48" name="TextBox 47"/>
+          <p:cNvSpPr txBox="1"/>
+          <p:nvPr/>
+        </p:nvSpPr>
+        <p:spPr>
+          <a:xfrm>
+            <a:off x="10980000" y="30039849"/>
+            <a:ext cx="1512000" cy="360000"/>
+          </a:xfrm>
+          <a:prstGeom prst="rect">
+            <a:avLst/>
+          </a:prstGeom>
+          <a:noFill/>
+        </p:spPr>
+        <p:txBody>
+          <a:bodyPr wrap="square" lIns="0" rIns="0" tIns="0" bIns="0">
+            <a:spAutoFit/>
+          </a:bodyPr>
+          <a:lstStyle/>
+          <a:p>
+            <a:pPr algn="ctr">
+              <a:lnSpc>
+                <a:spcPct val="124000"/>
+              </a:lnSpc>
+            </a:pPr>
+            <a:r>
+              <a:rPr sz="1952" b="0">
+                <a:solidFill>
+                  <a:srgbClr val="C7D4E6"/>
+                </a:solidFill>
+                <a:latin typeface="맑은 고딕"/>
+              </a:rPr>
+              <a:t>조건값 vᵢ</a:t>
+            </a:r>
+          </a:p>
+        </p:txBody>
+      </p:sp>
+      <p:sp>
+        <p:nvSpPr>
+          <p:cNvPr id="49" name="TextBox 48"/>
+          <p:cNvSpPr txBox="1"/>
+          <p:nvPr/>
+        </p:nvSpPr>
+        <p:spPr>
+          <a:xfrm>
+            <a:off x="12852000" y="30039849"/>
+            <a:ext cx="2304000" cy="360000"/>
+          </a:xfrm>
+          <a:prstGeom prst="rect">
+            <a:avLst/>
+          </a:prstGeom>
+          <a:noFill/>
+        </p:spPr>
+        <p:txBody>
+          <a:bodyPr wrap="square" lIns="0" rIns="0" tIns="0" bIns="0">
+            <a:spAutoFit/>
+          </a:bodyPr>
+          <a:lstStyle/>
+          <a:p>
+            <a:pPr algn="ctr">
+              <a:lnSpc>
+                <a:spcPct val="124000"/>
+              </a:lnSpc>
+            </a:pPr>
+            <a:r>
+              <a:rPr sz="1952" b="0">
+                <a:solidFill>
+                  <a:srgbClr val="C7D4E6"/>
+                </a:solidFill>
+                <a:latin typeface="맑은 고딕"/>
+              </a:rPr>
+              <a:t>오늘 74건</a:t>
+            </a:r>
+          </a:p>
+        </p:txBody>
+      </p:sp>
+      <p:sp>
+        <p:nvSpPr>
+          <p:cNvPr id="50" name="Rounded Rectangle 49"/>
+          <p:cNvSpPr/>
+          <p:nvPr/>
+        </p:nvSpPr>
+        <p:spPr>
+          <a:xfrm>
+            <a:off x="1152000" y="30594249"/>
+            <a:ext cx="2376000" cy="468000"/>
+          </a:xfrm>
+          <a:prstGeom prst="roundRect">
+            <a:avLst>
+              <a:gd name="adj" fmla="val 40000"/>
+            </a:avLst>
+          </a:prstGeom>
+          <a:solidFill>
+            <a:srgbClr val="0E7A5A"/>
+          </a:solidFill>
+          <a:ln>
+            <a:noFill/>
+          </a:ln>
+          <a:effectLst/>
+        </p:spPr>
+        <p:style>
+          <a:lnRef idx="1">
+            <a:schemeClr val="accent1"/>
+          </a:lnRef>
+          <a:fillRef idx="3">
+            <a:schemeClr val="accent1"/>
+          </a:fillRef>
+          <a:effectRef idx="2">
+            <a:schemeClr val="accent1"/>
+          </a:effectRef>
+          <a:fontRef idx="minor">
+            <a:schemeClr val="lt1"/>
+          </a:fontRef>
+        </p:style>
+        <p:txBody>
+          <a:bodyPr rtlCol="0" anchor="ctr" wrap="square" lIns="72000" rIns="72000" tIns="0" bIns="0"/>
+          <a:lstStyle/>
+          <a:p>
+            <a:pPr algn="ctr"/>
+            <a:r>
+              <a:rPr sz="1952" b="1">
+                <a:solidFill>
+                  <a:srgbClr val="FFFFFF"/>
+                </a:solidFill>
+                <a:latin typeface="맑은 고딕"/>
+              </a:rPr>
+              <a:t>신청가능</a:t>
+            </a:r>
+          </a:p>
+        </p:txBody>
+      </p:sp>
+      <p:sp>
+        <p:nvSpPr>
+          <p:cNvPr id="51" name="TextBox 50"/>
+          <p:cNvSpPr txBox="1"/>
+          <p:nvPr/>
+        </p:nvSpPr>
+        <p:spPr>
+          <a:xfrm>
+            <a:off x="3924000" y="30630249"/>
+            <a:ext cx="6696000" cy="432000"/>
+          </a:xfrm>
+          <a:prstGeom prst="rect">
+            <a:avLst/>
+          </a:prstGeom>
+          <a:noFill/>
+        </p:spPr>
+        <p:txBody>
+          <a:bodyPr wrap="square" lIns="0" rIns="0" tIns="0" bIns="0">
+            <a:spAutoFit/>
+          </a:bodyPr>
+          <a:lstStyle/>
+          <a:p>
+            <a:pPr algn="l">
+              <a:lnSpc>
+                <a:spcPct val="124000"/>
+              </a:lnSpc>
+            </a:pPr>
+            <a:r>
+              <a:rPr sz="2318" b="0">
+                <a:solidFill>
+                  <a:srgbClr val="2B2B2B"/>
+                </a:solidFill>
+                <a:latin typeface="맑은 고딕"/>
+              </a:rPr>
+              <a:t>조건이 모두 맞는다</a:t>
+            </a:r>
+          </a:p>
+        </p:txBody>
+      </p:sp>
+      <p:sp>
+        <p:nvSpPr>
+          <p:cNvPr id="52" name="TextBox 51"/>
+          <p:cNvSpPr txBox="1"/>
+          <p:nvPr/>
+        </p:nvSpPr>
+        <p:spPr>
+          <a:xfrm>
+            <a:off x="10980000" y="30630249"/>
+            <a:ext cx="1512000" cy="432000"/>
+          </a:xfrm>
+          <a:prstGeom prst="rect">
+            <a:avLst/>
+          </a:prstGeom>
+          <a:noFill/>
+        </p:spPr>
+        <p:txBody>
+          <a:bodyPr wrap="square" lIns="0" rIns="0" tIns="0" bIns="0">
+            <a:spAutoFit/>
+          </a:bodyPr>
+          <a:lstStyle/>
+          <a:p>
+            <a:pPr algn="ctr">
+              <a:lnSpc>
+                <a:spcPct val="124000"/>
+              </a:lnSpc>
+            </a:pPr>
+            <a:r>
+              <a:rPr sz="2318" b="1">
+                <a:solidFill>
+                  <a:srgbClr val="0E7A5A"/>
+                </a:solidFill>
+                <a:latin typeface="맑은 고딕"/>
+              </a:rPr>
+              <a:t>1.0</a:t>
+            </a:r>
+          </a:p>
+        </p:txBody>
+      </p:sp>
+      <p:sp>
+        <p:nvSpPr>
+          <p:cNvPr id="53" name="TextBox 52"/>
+          <p:cNvSpPr txBox="1"/>
+          <p:nvPr/>
+        </p:nvSpPr>
+        <p:spPr>
+          <a:xfrm>
+            <a:off x="12852000" y="30630249"/>
+            <a:ext cx="2304000" cy="432000"/>
+          </a:xfrm>
+          <a:prstGeom prst="rect">
+            <a:avLst/>
+          </a:prstGeom>
+          <a:noFill/>
+        </p:spPr>
+        <p:txBody>
+          <a:bodyPr wrap="square" lIns="0" rIns="0" tIns="0" bIns="0">
+            <a:spAutoFit/>
+          </a:bodyPr>
+          <a:lstStyle/>
+          <a:p>
+            <a:pPr algn="ctr">
+              <a:lnSpc>
+                <a:spcPct val="124000"/>
+              </a:lnSpc>
+            </a:pPr>
+            <a:r>
+              <a:rPr sz="2318" b="0">
+                <a:solidFill>
+                  <a:srgbClr val="2B2B2B"/>
+                </a:solidFill>
+                <a:latin typeface="맑은 고딕"/>
+              </a:rPr>
+              <a:t>31건</a:t>
+            </a:r>
+          </a:p>
+        </p:txBody>
+      </p:sp>
+      <p:sp>
+        <p:nvSpPr>
+          <p:cNvPr id="54" name="Rectangle 53"/>
+          <p:cNvSpPr/>
+          <p:nvPr/>
+        </p:nvSpPr>
+        <p:spPr>
+          <a:xfrm>
+            <a:off x="1080000" y="31206249"/>
+            <a:ext cx="14112000" cy="14400"/>
+          </a:xfrm>
+          <a:prstGeom prst="rect">
+            <a:avLst/>
+          </a:prstGeom>
+          <a:solidFill>
+            <a:srgbClr val="D8D2C4"/>
+          </a:solidFill>
+          <a:ln>
+            <a:noFill/>
+          </a:ln>
+          <a:effectLst/>
+        </p:spPr>
+        <p:style>
+          <a:lnRef idx="1">
+            <a:schemeClr val="accent1"/>
+          </a:lnRef>
+          <a:fillRef idx="3">
+            <a:schemeClr val="accent1"/>
+          </a:fillRef>
+          <a:effectRef idx="2">
+            <a:schemeClr val="accent1"/>
+          </a:effectRef>
+          <a:fontRef idx="minor">
+            <a:schemeClr val="lt1"/>
+          </a:fontRef>
+        </p:style>
+        <p:txBody>
+          <a:bodyPr rtlCol="0" anchor="ctr"/>
+          <a:lstStyle/>
+          <a:p>
+            <a:pPr algn="ctr"/>
+          </a:p>
+        </p:txBody>
+      </p:sp>
+      <p:sp>
+        <p:nvSpPr>
+          <p:cNvPr id="55" name="Rounded Rectangle 54"/>
+          <p:cNvSpPr/>
+          <p:nvPr/>
+        </p:nvSpPr>
+        <p:spPr>
+          <a:xfrm>
+            <a:off x="1152000" y="31350249"/>
+            <a:ext cx="2376000" cy="468000"/>
+          </a:xfrm>
+          <a:prstGeom prst="roundRect">
+            <a:avLst>
+              <a:gd name="adj" fmla="val 40000"/>
+            </a:avLst>
+          </a:prstGeom>
+          <a:solidFill>
+            <a:srgbClr val="CB6B3D"/>
+          </a:solidFill>
+          <a:ln>
+            <a:noFill/>
+          </a:ln>
+          <a:effectLst/>
+        </p:spPr>
+        <p:style>
+          <a:lnRef idx="1">
+            <a:schemeClr val="accent1"/>
+          </a:lnRef>
+          <a:fillRef idx="3">
+            <a:schemeClr val="accent1"/>
+          </a:fillRef>
+          <a:effectRef idx="2">
+            <a:schemeClr val="accent1"/>
+          </a:effectRef>
+          <a:fontRef idx="minor">
+            <a:schemeClr val="lt1"/>
+          </a:fontRef>
+        </p:style>
+        <p:txBody>
+          <a:bodyPr rtlCol="0" anchor="ctr" wrap="square" lIns="72000" rIns="72000" tIns="0" bIns="0"/>
+          <a:lstStyle/>
+          <a:p>
+            <a:pPr algn="ctr"/>
+            <a:r>
+              <a:rPr sz="1952" b="1">
+                <a:solidFill>
+                  <a:srgbClr val="FFFFFF"/>
+                </a:solidFill>
+                <a:latin typeface="맑은 고딕"/>
+              </a:rPr>
+              <a:t>확인필요</a:t>
+            </a:r>
+          </a:p>
+        </p:txBody>
+      </p:sp>
+      <p:sp>
+        <p:nvSpPr>
+          <p:cNvPr id="56" name="TextBox 55"/>
+          <p:cNvSpPr txBox="1"/>
+          <p:nvPr/>
+        </p:nvSpPr>
+        <p:spPr>
+          <a:xfrm>
+            <a:off x="3924000" y="31386249"/>
+            <a:ext cx="6696000" cy="432000"/>
+          </a:xfrm>
+          <a:prstGeom prst="rect">
+            <a:avLst/>
+          </a:prstGeom>
+          <a:noFill/>
+        </p:spPr>
+        <p:txBody>
+          <a:bodyPr wrap="square" lIns="0" rIns="0" tIns="0" bIns="0">
+            <a:spAutoFit/>
+          </a:bodyPr>
+          <a:lstStyle/>
+          <a:p>
+            <a:pPr algn="l">
+              <a:lnSpc>
+                <a:spcPct val="124000"/>
+              </a:lnSpc>
+            </a:pPr>
+            <a:r>
+              <a:rPr sz="2318" b="0">
+                <a:solidFill>
+                  <a:srgbClr val="2B2B2B"/>
+                </a:solidFill>
+                <a:latin typeface="맑은 고딕"/>
+              </a:rPr>
+              <a:t>공고문만으로는 판단이 서지 않는다</a:t>
+            </a:r>
+          </a:p>
+        </p:txBody>
+      </p:sp>
+      <p:sp>
+        <p:nvSpPr>
+          <p:cNvPr id="57" name="TextBox 56"/>
+          <p:cNvSpPr txBox="1"/>
+          <p:nvPr/>
+        </p:nvSpPr>
+        <p:spPr>
+          <a:xfrm>
+            <a:off x="10980000" y="31386249"/>
+            <a:ext cx="1512000" cy="432000"/>
+          </a:xfrm>
+          <a:prstGeom prst="rect">
+            <a:avLst/>
+          </a:prstGeom>
+          <a:noFill/>
+        </p:spPr>
+        <p:txBody>
+          <a:bodyPr wrap="square" lIns="0" rIns="0" tIns="0" bIns="0">
+            <a:spAutoFit/>
+          </a:bodyPr>
+          <a:lstStyle/>
+          <a:p>
+            <a:pPr algn="ctr">
+              <a:lnSpc>
+                <a:spcPct val="124000"/>
+              </a:lnSpc>
+            </a:pPr>
+            <a:r>
+              <a:rPr sz="2318" b="1">
+                <a:solidFill>
+                  <a:srgbClr val="CB6B3D"/>
+                </a:solidFill>
+                <a:latin typeface="맑은 고딕"/>
+              </a:rPr>
+              <a:t>0.5</a:t>
+            </a:r>
+          </a:p>
+        </p:txBody>
+      </p:sp>
+      <p:sp>
+        <p:nvSpPr>
+          <p:cNvPr id="58" name="TextBox 57"/>
+          <p:cNvSpPr txBox="1"/>
+          <p:nvPr/>
+        </p:nvSpPr>
+        <p:spPr>
+          <a:xfrm>
+            <a:off x="12852000" y="31386249"/>
+            <a:ext cx="2304000" cy="432000"/>
+          </a:xfrm>
+          <a:prstGeom prst="rect">
+            <a:avLst/>
+          </a:prstGeom>
+          <a:noFill/>
+        </p:spPr>
+        <p:txBody>
+          <a:bodyPr wrap="square" lIns="0" rIns="0" tIns="0" bIns="0">
+            <a:spAutoFit/>
+          </a:bodyPr>
+          <a:lstStyle/>
+          <a:p>
+            <a:pPr algn="ctr">
+              <a:lnSpc>
+                <a:spcPct val="124000"/>
+              </a:lnSpc>
+            </a:pPr>
+            <a:r>
+              <a:rPr sz="2318" b="0">
+                <a:solidFill>
+                  <a:srgbClr val="2B2B2B"/>
+                </a:solidFill>
+                <a:latin typeface="맑은 고딕"/>
+              </a:rPr>
+              <a:t>27건</a:t>
+            </a:r>
+          </a:p>
+        </p:txBody>
+      </p:sp>
+      <p:sp>
+        <p:nvSpPr>
+          <p:cNvPr id="59" name="Rectangle 58"/>
+          <p:cNvSpPr/>
+          <p:nvPr/>
+        </p:nvSpPr>
+        <p:spPr>
+          <a:xfrm>
+            <a:off x="1080000" y="31962249"/>
+            <a:ext cx="14112000" cy="14400"/>
+          </a:xfrm>
+          <a:prstGeom prst="rect">
+            <a:avLst/>
+          </a:prstGeom>
+          <a:solidFill>
+            <a:srgbClr val="D8D2C4"/>
+          </a:solidFill>
+          <a:ln>
+            <a:noFill/>
+          </a:ln>
+          <a:effectLst/>
+        </p:spPr>
+        <p:style>
+          <a:lnRef idx="1">
+            <a:schemeClr val="accent1"/>
+          </a:lnRef>
+          <a:fillRef idx="3">
+            <a:schemeClr val="accent1"/>
+          </a:fillRef>
+          <a:effectRef idx="2">
+            <a:schemeClr val="accent1"/>
+          </a:effectRef>
+          <a:fontRef idx="minor">
+            <a:schemeClr val="lt1"/>
+          </a:fontRef>
+        </p:style>
+        <p:txBody>
+          <a:bodyPr rtlCol="0" anchor="ctr"/>
+          <a:lstStyle/>
+          <a:p>
+            <a:pPr algn="ctr"/>
+          </a:p>
+        </p:txBody>
+      </p:sp>
+      <p:sp>
+        <p:nvSpPr>
+          <p:cNvPr id="60" name="Rounded Rectangle 59"/>
+          <p:cNvSpPr/>
+          <p:nvPr/>
+        </p:nvSpPr>
+        <p:spPr>
+          <a:xfrm>
+            <a:off x="1152000" y="32106249"/>
+            <a:ext cx="2376000" cy="468000"/>
+          </a:xfrm>
+          <a:prstGeom prst="roundRect">
+            <a:avLst>
+              <a:gd name="adj" fmla="val 40000"/>
+            </a:avLst>
+          </a:prstGeom>
+          <a:solidFill>
+            <a:srgbClr val="6B6459"/>
+          </a:solidFill>
+          <a:ln>
+            <a:noFill/>
+          </a:ln>
+          <a:effectLst/>
+        </p:spPr>
+        <p:style>
+          <a:lnRef idx="1">
+            <a:schemeClr val="accent1"/>
+          </a:lnRef>
+          <a:fillRef idx="3">
+            <a:schemeClr val="accent1"/>
+          </a:fillRef>
+          <a:effectRef idx="2">
+            <a:schemeClr val="accent1"/>
+          </a:effectRef>
+          <a:fontRef idx="minor">
+            <a:schemeClr val="lt1"/>
+          </a:fontRef>
+        </p:style>
+        <p:txBody>
+          <a:bodyPr rtlCol="0" anchor="ctr" wrap="square" lIns="72000" rIns="72000" tIns="0" bIns="0"/>
+          <a:lstStyle/>
+          <a:p>
+            <a:pPr algn="ctr"/>
+            <a:r>
+              <a:rPr sz="1952" b="1">
+                <a:solidFill>
+                  <a:srgbClr val="FFFFFF"/>
+                </a:solidFill>
+                <a:latin typeface="맑은 고딕"/>
+              </a:rPr>
+              <a:t>대상아님</a:t>
+            </a:r>
+          </a:p>
+        </p:txBody>
+      </p:sp>
+      <p:sp>
+        <p:nvSpPr>
+          <p:cNvPr id="61" name="TextBox 60"/>
+          <p:cNvSpPr txBox="1"/>
+          <p:nvPr/>
+        </p:nvSpPr>
+        <p:spPr>
+          <a:xfrm>
+            <a:off x="3924000" y="32142249"/>
+            <a:ext cx="6696000" cy="432000"/>
+          </a:xfrm>
+          <a:prstGeom prst="rect">
+            <a:avLst/>
+          </a:prstGeom>
+          <a:noFill/>
+        </p:spPr>
+        <p:txBody>
+          <a:bodyPr wrap="square" lIns="0" rIns="0" tIns="0" bIns="0">
+            <a:spAutoFit/>
+          </a:bodyPr>
+          <a:lstStyle/>
+          <a:p>
+            <a:pPr algn="l">
+              <a:lnSpc>
+                <a:spcPct val="124000"/>
+              </a:lnSpc>
+            </a:pPr>
+            <a:r>
+              <a:rPr sz="2318" b="0">
+                <a:solidFill>
+                  <a:srgbClr val="2B2B2B"/>
+                </a:solidFill>
+                <a:latin typeface="맑은 고딕"/>
+              </a:rPr>
+              <a:t>맞지 않는 조건이 분명히 있다</a:t>
+            </a:r>
+          </a:p>
+        </p:txBody>
+      </p:sp>
+      <p:sp>
+        <p:nvSpPr>
+          <p:cNvPr id="62" name="TextBox 61"/>
+          <p:cNvSpPr txBox="1"/>
+          <p:nvPr/>
+        </p:nvSpPr>
+        <p:spPr>
+          <a:xfrm>
+            <a:off x="10980000" y="32142249"/>
+            <a:ext cx="1512000" cy="432000"/>
+          </a:xfrm>
+          <a:prstGeom prst="rect">
+            <a:avLst/>
+          </a:prstGeom>
+          <a:noFill/>
+        </p:spPr>
+        <p:txBody>
+          <a:bodyPr wrap="square" lIns="0" rIns="0" tIns="0" bIns="0">
+            <a:spAutoFit/>
+          </a:bodyPr>
+          <a:lstStyle/>
+          <a:p>
+            <a:pPr algn="ctr">
+              <a:lnSpc>
+                <a:spcPct val="124000"/>
+              </a:lnSpc>
+            </a:pPr>
+            <a:r>
+              <a:rPr sz="2318" b="1">
+                <a:solidFill>
+                  <a:srgbClr val="6B6459"/>
+                </a:solidFill>
+                <a:latin typeface="맑은 고딕"/>
+              </a:rPr>
+              <a:t>0.0</a:t>
+            </a:r>
+          </a:p>
+        </p:txBody>
+      </p:sp>
+      <p:sp>
+        <p:nvSpPr>
+          <p:cNvPr id="63" name="TextBox 62"/>
+          <p:cNvSpPr txBox="1"/>
+          <p:nvPr/>
+        </p:nvSpPr>
+        <p:spPr>
+          <a:xfrm>
+            <a:off x="12852000" y="32142249"/>
+            <a:ext cx="2304000" cy="432000"/>
+          </a:xfrm>
+          <a:prstGeom prst="rect">
+            <a:avLst/>
+          </a:prstGeom>
+          <a:noFill/>
+        </p:spPr>
+        <p:txBody>
+          <a:bodyPr wrap="square" lIns="0" rIns="0" tIns="0" bIns="0">
+            <a:spAutoFit/>
+          </a:bodyPr>
+          <a:lstStyle/>
+          <a:p>
+            <a:pPr algn="ctr">
+              <a:lnSpc>
+                <a:spcPct val="124000"/>
+              </a:lnSpc>
+            </a:pPr>
+            <a:r>
+              <a:rPr sz="2318" b="0">
+                <a:solidFill>
+                  <a:srgbClr val="2B2B2B"/>
+                </a:solidFill>
+                <a:latin typeface="맑은 고딕"/>
+              </a:rPr>
+              <a:t>16건</a:t>
+            </a:r>
+          </a:p>
+        </p:txBody>
+      </p:sp>
+      <p:sp>
+        <p:nvSpPr>
+          <p:cNvPr id="64" name="Rounded Rectangle 63"/>
+          <p:cNvSpPr/>
+          <p:nvPr/>
+        </p:nvSpPr>
+        <p:spPr>
+          <a:xfrm>
+            <a:off x="936000" y="29910249"/>
+            <a:ext cx="14400000" cy="2808000"/>
+          </a:xfrm>
+          <a:prstGeom prst="roundRect">
+            <a:avLst>
+              <a:gd name="adj" fmla="val 4500"/>
+            </a:avLst>
+          </a:prstGeom>
+          <a:noFill/>
+          <a:ln w="12700">
+            <a:solidFill>
+              <a:srgbClr val="D8D2C4"/>
+            </a:solidFill>
+          </a:ln>
+          <a:effectLst/>
+        </p:spPr>
+        <p:style>
+          <a:lnRef idx="1">
+            <a:schemeClr val="accent1"/>
+          </a:lnRef>
+          <a:fillRef idx="3">
+            <a:schemeClr val="accent1"/>
+          </a:fillRef>
+          <a:effectRef idx="2">
+            <a:schemeClr val="accent1"/>
+          </a:effectRef>
+          <a:fontRef idx="minor">
+            <a:schemeClr val="lt1"/>
+          </a:fontRef>
+        </p:style>
+        <p:txBody>
+          <a:bodyPr rtlCol="0" anchor="ctr"/>
+          <a:lstStyle/>
+          <a:p>
+            <a:pPr algn="ctr"/>
+          </a:p>
+        </p:txBody>
+      </p:sp>
       <p:pic>
         <p:nvPicPr>
-          <p:cNvPr id="45" name="Picture 44" descr="judge.png"/>
+          <p:cNvPr id="65" name="Picture 64" descr="judge.png"/>
           <p:cNvPicPr>
             <a:picLocks noChangeAspect="1"/>
           </p:cNvPicPr>
@@ -5111,8 +5963,8 @@
         </p:blipFill>
         <p:spPr>
           <a:xfrm>
-            <a:off x="936000" y="28974249"/>
-            <a:ext cx="4891986" cy="7200000"/>
+            <a:off x="936000" y="33042249"/>
+            <a:ext cx="3668990" cy="5400000"/>
           </a:xfrm>
           <a:prstGeom prst="rect">
             <a:avLst/>
@@ -5121,14 +5973,14 @@
       </p:pic>
       <p:sp>
         <p:nvSpPr>
-          <p:cNvPr id="46" name="Rectangle 45"/>
+          <p:cNvPr id="66" name="Rectangle 65"/>
           <p:cNvSpPr/>
           <p:nvPr/>
         </p:nvSpPr>
         <p:spPr>
           <a:xfrm>
-            <a:off x="936000" y="28974249"/>
-            <a:ext cx="4891986" cy="7200000"/>
+            <a:off x="936000" y="33042249"/>
+            <a:ext cx="3668990" cy="5400000"/>
           </a:xfrm>
           <a:prstGeom prst="rect">
             <a:avLst/>
@@ -5165,14 +6017,14 @@
       </p:sp>
       <p:sp>
         <p:nvSpPr>
-          <p:cNvPr id="47" name="TextBox 46"/>
+          <p:cNvPr id="67" name="TextBox 66"/>
           <p:cNvSpPr txBox="1"/>
           <p:nvPr/>
         </p:nvSpPr>
         <p:spPr>
           <a:xfrm>
-            <a:off x="6403986" y="28938249"/>
-            <a:ext cx="8932014" cy="403053"/>
+            <a:off x="5180990" y="33006249"/>
+            <a:ext cx="10155010" cy="383860"/>
           </a:xfrm>
           <a:prstGeom prst="rect">
             <a:avLst/>
@@ -5191,27 +6043,27 @@
               </a:lnSpc>
             </a:pPr>
             <a:r>
-              <a:rPr sz="2562" b="1">
+              <a:rPr sz="2440" b="1">
                 <a:solidFill>
                   <a:srgbClr val="003670"/>
                 </a:solidFill>
                 <a:latin typeface="맑은 고딕"/>
               </a:rPr>
-              <a:t>3단으로 판정한다</a:t>
-            </a:r>
-          </a:p>
-        </p:txBody>
-      </p:sp>
-      <p:sp>
-        <p:nvSpPr>
-          <p:cNvPr id="48" name="TextBox 47"/>
+              <a:t>「확인필요」를 지우지 않는다.</a:t>
+            </a:r>
+          </a:p>
+        </p:txBody>
+      </p:sp>
+      <p:sp>
+        <p:nvSpPr>
+          <p:cNvPr id="68" name="TextBox 67"/>
           <p:cNvSpPr txBox="1"/>
           <p:nvPr/>
         </p:nvSpPr>
         <p:spPr>
           <a:xfrm>
-            <a:off x="6403986" y="29449303"/>
-            <a:ext cx="8932014" cy="1306094"/>
+            <a:off x="5180990" y="33534110"/>
+            <a:ext cx="10155010" cy="1036424"/>
           </a:xfrm>
           <a:prstGeom prst="rect">
             <a:avLst/>
@@ -5230,92 +6082,27 @@
               </a:lnSpc>
             </a:pPr>
             <a:r>
-              <a:rPr sz="2318" b="1">
-                <a:solidFill>
-                  <a:srgbClr val="0E7A5A"/>
-                </a:solidFill>
-                <a:latin typeface="맑은 고딕"/>
-              </a:rPr>
-              <a:t>신청가능</a:t>
-            </a:r>
-            <a:r>
-              <a:rPr sz="2318" b="0">
+              <a:rPr sz="2196" b="0">
                 <a:solidFill>
                   <a:srgbClr val="2B2B2B"/>
                 </a:solidFill>
                 <a:latin typeface="맑은 고딕"/>
               </a:rPr>
-              <a:t>  조건이 다 맞는다</a:t>
-            </a:r>
-          </a:p>
-          <a:p>
-            <a:pPr algn="l">
-              <a:lnSpc>
-                <a:spcPct val="124000"/>
-              </a:lnSpc>
-              <a:spcBef>
-                <a:spcPts val="834"/>
-              </a:spcBef>
-            </a:pPr>
-            <a:r>
-              <a:rPr sz="2318" b="1">
-                <a:solidFill>
-                  <a:srgbClr val="CB6B3D"/>
-                </a:solidFill>
-                <a:latin typeface="맑은 고딕"/>
-              </a:rPr>
-              <a:t>확인필요</a:t>
-            </a:r>
-            <a:r>
-              <a:rPr sz="2318" b="0">
-                <a:solidFill>
-                  <a:srgbClr val="2B2B2B"/>
-                </a:solidFill>
-                <a:latin typeface="맑은 고딕"/>
-              </a:rPr>
-              <a:t>  우리도 모른다</a:t>
-            </a:r>
-          </a:p>
-          <a:p>
-            <a:pPr algn="l">
-              <a:lnSpc>
-                <a:spcPct val="124000"/>
-              </a:lnSpc>
-              <a:spcBef>
-                <a:spcPts val="834"/>
-              </a:spcBef>
-            </a:pPr>
-            <a:r>
-              <a:rPr sz="2318" b="1">
-                <a:solidFill>
-                  <a:srgbClr val="6B6459"/>
-                </a:solidFill>
-                <a:latin typeface="맑은 고딕"/>
-              </a:rPr>
-              <a:t>대상아님</a:t>
-            </a:r>
-            <a:r>
-              <a:rPr sz="2318" b="0">
-                <a:solidFill>
-                  <a:srgbClr val="2B2B2B"/>
-                </a:solidFill>
-                <a:latin typeface="맑은 고딕"/>
-              </a:rPr>
-              <a:t>  확실히 아니다</a:t>
-            </a:r>
-          </a:p>
-        </p:txBody>
-      </p:sp>
-      <p:sp>
-        <p:nvSpPr>
-          <p:cNvPr id="49" name="TextBox 48"/>
+              <a:t>모르는 것을 아는 척도, 모르는 척도 하지 않는다. 업종이 못 박힌 공고는 대상아님이 아니라 확인필요로 내린다 — 제조업을 겸하는 사장님이 있기 때문이다.</a:t>
+            </a:r>
+          </a:p>
+        </p:txBody>
+      </p:sp>
+      <p:sp>
+        <p:nvSpPr>
+          <p:cNvPr id="69" name="TextBox 68"/>
           <p:cNvSpPr txBox="1"/>
           <p:nvPr/>
         </p:nvSpPr>
         <p:spPr>
           <a:xfrm>
-            <a:off x="6403986" y="31079397"/>
-            <a:ext cx="8932014" cy="383860"/>
+            <a:off x="5180990" y="34966534"/>
+            <a:ext cx="10155010" cy="383860"/>
           </a:xfrm>
           <a:prstGeom prst="rect">
             <a:avLst/>
@@ -5340,21 +6127,21 @@
                 </a:solidFill>
                 <a:latin typeface="맑은 고딕"/>
               </a:rPr>
-              <a:t>「확인필요」를 지우지 않는다.</a:t>
-            </a:r>
-          </a:p>
-        </p:txBody>
-      </p:sp>
-      <p:sp>
-        <p:nvSpPr>
-          <p:cNvPr id="50" name="TextBox 49"/>
+              <a:t>조건마다 무게가 다르다</a:t>
+            </a:r>
+          </a:p>
+        </p:txBody>
+      </p:sp>
+      <p:sp>
+        <p:nvSpPr>
+          <p:cNvPr id="70" name="TextBox 69"/>
           <p:cNvSpPr txBox="1"/>
           <p:nvPr/>
         </p:nvSpPr>
         <p:spPr>
           <a:xfrm>
-            <a:off x="6403986" y="31607258"/>
-            <a:ext cx="8932014" cy="1036424"/>
+            <a:off x="5180990" y="35494395"/>
+            <a:ext cx="10155010" cy="1036424"/>
           </a:xfrm>
           <a:prstGeom prst="rect">
             <a:avLst/>
@@ -5379,21 +6166,21 @@
                 </a:solidFill>
                 <a:latin typeface="맑은 고딕"/>
               </a:rPr>
-              <a:t>모르는 것을 아는 척도, 모르는 척도 하지 않는다. 업종이 못 박힌 공고는 대상아님이 아니라 확인필요로 내린다 — 제조업을 겸하는 사장님이 있기 때문이다.</a:t>
-            </a:r>
-          </a:p>
-        </p:txBody>
-      </p:sp>
-      <p:sp>
-        <p:nvSpPr>
-          <p:cNvPr id="51" name="TextBox 50"/>
+              <a:t>「소상공인이면 누구나」에는 0.7점만 준다. 자격은 되지만 나에게 맞는 사업은 아니다. 1.0 을 주면 요건이 그것뿐인 공고가 전부 100점으로 묶여 순위가 사라진다.</a:t>
+            </a:r>
+          </a:p>
+        </p:txBody>
+      </p:sp>
+      <p:sp>
+        <p:nvSpPr>
+          <p:cNvPr id="71" name="TextBox 70"/>
           <p:cNvSpPr txBox="1"/>
           <p:nvPr/>
         </p:nvSpPr>
         <p:spPr>
           <a:xfrm>
-            <a:off x="6403986" y="33039682"/>
-            <a:ext cx="8932014" cy="383860"/>
+            <a:off x="5180990" y="36926819"/>
+            <a:ext cx="10155010" cy="383860"/>
           </a:xfrm>
           <a:prstGeom prst="rect">
             <a:avLst/>
@@ -5418,21 +6205,21 @@
                 </a:solidFill>
                 <a:latin typeface="맑은 고딕"/>
               </a:rPr>
-              <a:t>조건마다 무게가 다르다</a:t>
-            </a:r>
-          </a:p>
-        </p:txBody>
-      </p:sp>
-      <p:sp>
-        <p:nvSpPr>
-          <p:cNvPr id="52" name="TextBox 51"/>
+              <a:t>「불충족」은 확실할 때만 쓴다</a:t>
+            </a:r>
+          </a:p>
+        </p:txBody>
+      </p:sp>
+      <p:sp>
+        <p:nvSpPr>
+          <p:cNvPr id="72" name="TextBox 71"/>
           <p:cNvSpPr txBox="1"/>
           <p:nvPr/>
         </p:nvSpPr>
         <p:spPr>
           <a:xfrm>
-            <a:off x="6403986" y="33567543"/>
-            <a:ext cx="8932014" cy="1381898"/>
+            <a:off x="5180990" y="37454680"/>
+            <a:ext cx="10155010" cy="690949"/>
           </a:xfrm>
           <a:prstGeom prst="rect">
             <a:avLst/>
@@ -5457,21 +6244,21 @@
                 </a:solidFill>
                 <a:latin typeface="맑은 고딕"/>
               </a:rPr>
-              <a:t>「소상공인이면 누구나」에는 0.7점만 준다. 자격은 되지만 나에게 맞는 사업은 아니다. 1.0 을 주면 요건이 그것뿐인 공고가 전부 100점으로 묶여 순위가 사라진다.</a:t>
-            </a:r>
-          </a:p>
-        </p:txBody>
-      </p:sp>
-      <p:sp>
-        <p:nvSpPr>
-          <p:cNvPr id="53" name="TextBox 52"/>
+              <a:t>하나라도 있으면 그 공고는 대상아님이 되어 목록에서 사라진다. 애매한 것은 여기 넣지 않고 확인필요로 남긴다.</a:t>
+            </a:r>
+          </a:p>
+        </p:txBody>
+      </p:sp>
+      <p:sp>
+        <p:nvSpPr>
+          <p:cNvPr id="73" name="TextBox 72"/>
           <p:cNvSpPr txBox="1"/>
           <p:nvPr/>
         </p:nvSpPr>
         <p:spPr>
           <a:xfrm>
-            <a:off x="6403986" y="35345442"/>
-            <a:ext cx="8932014" cy="383860"/>
+            <a:off x="936000" y="38802249"/>
+            <a:ext cx="14400000" cy="1947058"/>
           </a:xfrm>
           <a:prstGeom prst="rect">
             <a:avLst/>
@@ -5490,230 +6277,22 @@
               </a:lnSpc>
             </a:pPr>
             <a:r>
-              <a:rPr sz="2440" b="1">
+              <a:rPr sz="2318" b="1">
                 <a:solidFill>
                   <a:srgbClr val="003670"/>
                 </a:solidFill>
                 <a:latin typeface="맑은 고딕"/>
               </a:rPr>
-              <a:t>「불충족」은 확실할 때만 쓴다</a:t>
-            </a:r>
-          </a:p>
-        </p:txBody>
-      </p:sp>
-      <p:sp>
-        <p:nvSpPr>
-          <p:cNvPr id="54" name="TextBox 53"/>
-          <p:cNvSpPr txBox="1"/>
-          <p:nvPr/>
-        </p:nvSpPr>
-        <p:spPr>
-          <a:xfrm>
-            <a:off x="6403986" y="35873303"/>
-            <a:ext cx="8932014" cy="1036424"/>
-          </a:xfrm>
-          <a:prstGeom prst="rect">
-            <a:avLst/>
-          </a:prstGeom>
-          <a:noFill/>
-        </p:spPr>
-        <p:txBody>
-          <a:bodyPr wrap="square" lIns="0" rIns="0" tIns="0" bIns="0">
-            <a:spAutoFit/>
-          </a:bodyPr>
-          <a:lstStyle/>
-          <a:p>
-            <a:pPr algn="l">
-              <a:lnSpc>
-                <a:spcPct val="124000"/>
-              </a:lnSpc>
-            </a:pPr>
-            <a:r>
-              <a:rPr sz="2196" b="0">
+              <a:t>오늘 74건에서 조건 309개를 판정했다</a:t>
+            </a:r>
+            <a:r>
+              <a:rPr sz="2318" b="0">
                 <a:solidFill>
                   <a:srgbClr val="2B2B2B"/>
                 </a:solidFill>
                 <a:latin typeface="맑은 고딕"/>
               </a:rPr>
-              <a:t>하나라도 있으면 그 공고는 대상아님이 되어 목록에서 사라진다. 애매한 것은 여기 넣지 않고 확인필요로 남긴다.</a:t>
-            </a:r>
-          </a:p>
-        </p:txBody>
-      </p:sp>
-      <p:sp>
-        <p:nvSpPr>
-          <p:cNvPr id="55" name="Rounded Rectangle 54"/>
-          <p:cNvSpPr/>
-          <p:nvPr/>
-        </p:nvSpPr>
-        <p:spPr>
-          <a:xfrm>
-            <a:off x="936000" y="37269727"/>
-            <a:ext cx="14400000" cy="1080000"/>
-          </a:xfrm>
-          <a:prstGeom prst="roundRect">
-            <a:avLst>
-              <a:gd name="adj" fmla="val 14000"/>
-            </a:avLst>
-          </a:prstGeom>
-          <a:solidFill>
-            <a:srgbClr val="ECF1F7"/>
-          </a:solidFill>
-          <a:ln>
-            <a:noFill/>
-          </a:ln>
-          <a:effectLst/>
-        </p:spPr>
-        <p:style>
-          <a:lnRef idx="1">
-            <a:schemeClr val="accent1"/>
-          </a:lnRef>
-          <a:fillRef idx="3">
-            <a:schemeClr val="accent1"/>
-          </a:fillRef>
-          <a:effectRef idx="2">
-            <a:schemeClr val="accent1"/>
-          </a:effectRef>
-          <a:fontRef idx="minor">
-            <a:schemeClr val="lt1"/>
-          </a:fontRef>
-        </p:style>
-        <p:txBody>
-          <a:bodyPr rtlCol="0" anchor="ctr"/>
-          <a:lstStyle/>
-          <a:p>
-            <a:pPr algn="ctr"/>
-          </a:p>
-        </p:txBody>
-      </p:sp>
-      <p:sp>
-        <p:nvSpPr>
-          <p:cNvPr id="56" name="TextBox 55"/>
-          <p:cNvSpPr txBox="1"/>
-          <p:nvPr/>
-        </p:nvSpPr>
-        <p:spPr>
-          <a:xfrm>
-            <a:off x="1152000" y="37485727"/>
-            <a:ext cx="13968000" cy="720000"/>
-          </a:xfrm>
-          <a:prstGeom prst="rect">
-            <a:avLst/>
-          </a:prstGeom>
-          <a:noFill/>
-        </p:spPr>
-        <p:txBody>
-          <a:bodyPr wrap="square" lIns="0" rIns="0" tIns="0" bIns="0">
-            <a:spAutoFit/>
-          </a:bodyPr>
-          <a:lstStyle/>
-          <a:p>
-            <a:pPr algn="ctr">
-              <a:lnSpc>
-                <a:spcPct val="124000"/>
-              </a:lnSpc>
-            </a:pPr>
-            <a:r>
-              <a:rPr sz="2074" b="0">
-                <a:solidFill>
-                  <a:srgbClr val="6B6459"/>
-                </a:solidFill>
-                <a:latin typeface="맑은 고딕"/>
-              </a:rPr>
-              <a:t>조건 하나의 값 vᵢ  </a:t>
-            </a:r>
-            <a:r>
-              <a:rPr sz="2318" b="1">
-                <a:solidFill>
-                  <a:srgbClr val="0E7A5A"/>
-                </a:solidFill>
-                <a:latin typeface="맑은 고딕"/>
-              </a:rPr>
-              <a:t>충족 1.0</a:t>
-            </a:r>
-            <a:r>
-              <a:rPr sz="2318" b="0">
-                <a:solidFill>
-                  <a:srgbClr val="6B6459"/>
-                </a:solidFill>
-                <a:latin typeface="맑은 고딕"/>
-              </a:rPr>
-              <a:t>   ·   </a:t>
-            </a:r>
-            <a:r>
-              <a:rPr sz="2318" b="1">
-                <a:solidFill>
-                  <a:srgbClr val="CB6B3D"/>
-                </a:solidFill>
-                <a:latin typeface="맑은 고딕"/>
-              </a:rPr>
-              <a:t>확인필요 0.5</a:t>
-            </a:r>
-            <a:r>
-              <a:rPr sz="2318" b="0">
-                <a:solidFill>
-                  <a:srgbClr val="6B6459"/>
-                </a:solidFill>
-                <a:latin typeface="맑은 고딕"/>
-              </a:rPr>
-              <a:t>   ·   </a:t>
-            </a:r>
-            <a:r>
-              <a:rPr sz="2318" b="1">
-                <a:solidFill>
-                  <a:srgbClr val="6B6459"/>
-                </a:solidFill>
-                <a:latin typeface="맑은 고딕"/>
-              </a:rPr>
-              <a:t>불충족 0.0</a:t>
-            </a:r>
-          </a:p>
-        </p:txBody>
-      </p:sp>
-      <p:sp>
-        <p:nvSpPr>
-          <p:cNvPr id="57" name="TextBox 56"/>
-          <p:cNvSpPr txBox="1"/>
-          <p:nvPr/>
-        </p:nvSpPr>
-        <p:spPr>
-          <a:xfrm>
-            <a:off x="936000" y="38637727"/>
-            <a:ext cx="14400000" cy="2311726"/>
-          </a:xfrm>
-          <a:prstGeom prst="rect">
-            <a:avLst/>
-          </a:prstGeom>
-          <a:noFill/>
-        </p:spPr>
-        <p:txBody>
-          <a:bodyPr wrap="square" lIns="0" rIns="0" tIns="0" bIns="0">
-            <a:spAutoFit/>
-          </a:bodyPr>
-          <a:lstStyle/>
-          <a:p>
-            <a:pPr algn="l">
-              <a:lnSpc>
-                <a:spcPct val="124000"/>
-              </a:lnSpc>
-            </a:pPr>
-            <a:r>
-              <a:rPr sz="2318" b="1">
-                <a:solidFill>
-                  <a:srgbClr val="003670"/>
-                </a:solidFill>
-                <a:latin typeface="맑은 고딕"/>
-              </a:rPr>
-              <a:t>오늘 74건에서 조건 309개를 판정했다</a:t>
-            </a:r>
-            <a:r>
-              <a:rPr sz="2318" b="0">
-                <a:solidFill>
-                  <a:srgbClr val="2B2B2B"/>
-                </a:solidFill>
-                <a:latin typeface="맑은 고딕"/>
-              </a:rPr>
-              <a:t> — 충족 247 · 확인필요 46 · 불충족 16. 결과는 신청가능 31 · 확인필요 27 · 대상아님 16 으로 갈렸고, 공고마다 서류도 같이 붙는다(195개 · 52종).</a:t>
+              <a:t> — 충족 247 · 확인필요 46 · 불충족 16. 공고마다 서류도 같이 붙는다(195개 · 52종).</a:t>
             </a:r>
           </a:p>
           <a:p>
@@ -5748,7 +6327,7 @@
       </p:sp>
       <p:sp>
         <p:nvSpPr>
-          <p:cNvPr id="83" name="Rounded Rectangle 82"/>
+          <p:cNvPr id="99" name="Rounded Rectangle 98"/>
           <p:cNvSpPr/>
           <p:nvPr/>
         </p:nvSpPr>
@@ -5796,7 +6375,7 @@
       </p:sp>
       <p:sp>
         <p:nvSpPr>
-          <p:cNvPr id="84" name="Rounded Rectangle 83"/>
+          <p:cNvPr id="100" name="Rounded Rectangle 99"/>
           <p:cNvSpPr/>
           <p:nvPr/>
         </p:nvSpPr>
@@ -5851,7 +6430,7 @@
       </p:sp>
       <p:sp>
         <p:nvSpPr>
-          <p:cNvPr id="60" name="TextBox 59"/>
+          <p:cNvPr id="76" name="TextBox 75"/>
           <p:cNvSpPr txBox="1"/>
           <p:nvPr/>
         </p:nvSpPr>
@@ -5899,7 +6478,7 @@
       </p:sp>
       <p:pic>
         <p:nvPicPr>
-          <p:cNvPr id="61" name="Picture 60" descr="apply.png"/>
+          <p:cNvPr id="77" name="Picture 76" descr="apply.png"/>
           <p:cNvPicPr>
             <a:picLocks noChangeAspect="1"/>
           </p:cNvPicPr>
@@ -5923,7 +6502,7 @@
       </p:pic>
       <p:sp>
         <p:nvSpPr>
-          <p:cNvPr id="62" name="Rectangle 61"/>
+          <p:cNvPr id="78" name="Rectangle 77"/>
           <p:cNvSpPr/>
           <p:nvPr/>
         </p:nvSpPr>
@@ -5967,7 +6546,7 @@
       </p:sp>
       <p:sp>
         <p:nvSpPr>
-          <p:cNvPr id="63" name="TextBox 62"/>
+          <p:cNvPr id="79" name="TextBox 78"/>
           <p:cNvSpPr txBox="1"/>
           <p:nvPr/>
         </p:nvSpPr>
@@ -6006,7 +6585,7 @@
       </p:sp>
       <p:sp>
         <p:nvSpPr>
-          <p:cNvPr id="64" name="Oval 63"/>
+          <p:cNvPr id="80" name="Oval 79"/>
           <p:cNvSpPr/>
           <p:nvPr/>
         </p:nvSpPr>
@@ -6059,7 +6638,7 @@
       </p:sp>
       <p:sp>
         <p:nvSpPr>
-          <p:cNvPr id="65" name="TextBox 64"/>
+          <p:cNvPr id="81" name="TextBox 80"/>
           <p:cNvSpPr txBox="1"/>
           <p:nvPr/>
         </p:nvSpPr>
@@ -6098,7 +6677,7 @@
       </p:sp>
       <p:sp>
         <p:nvSpPr>
-          <p:cNvPr id="66" name="TextBox 65"/>
+          <p:cNvPr id="82" name="TextBox 81"/>
           <p:cNvSpPr txBox="1"/>
           <p:nvPr/>
         </p:nvSpPr>
@@ -6137,7 +6716,7 @@
       </p:sp>
       <p:sp>
         <p:nvSpPr>
-          <p:cNvPr id="67" name="Oval 66"/>
+          <p:cNvPr id="83" name="Oval 82"/>
           <p:cNvSpPr/>
           <p:nvPr/>
         </p:nvSpPr>
@@ -6190,7 +6769,7 @@
       </p:sp>
       <p:sp>
         <p:nvSpPr>
-          <p:cNvPr id="68" name="TextBox 67"/>
+          <p:cNvPr id="84" name="TextBox 83"/>
           <p:cNvSpPr txBox="1"/>
           <p:nvPr/>
         </p:nvSpPr>
@@ -6229,7 +6808,7 @@
       </p:sp>
       <p:sp>
         <p:nvSpPr>
-          <p:cNvPr id="69" name="TextBox 68"/>
+          <p:cNvPr id="85" name="TextBox 84"/>
           <p:cNvSpPr txBox="1"/>
           <p:nvPr/>
         </p:nvSpPr>
@@ -6268,7 +6847,7 @@
       </p:sp>
       <p:sp>
         <p:nvSpPr>
-          <p:cNvPr id="70" name="Oval 69"/>
+          <p:cNvPr id="86" name="Oval 85"/>
           <p:cNvSpPr/>
           <p:nvPr/>
         </p:nvSpPr>
@@ -6321,7 +6900,7 @@
       </p:sp>
       <p:sp>
         <p:nvSpPr>
-          <p:cNvPr id="71" name="TextBox 70"/>
+          <p:cNvPr id="87" name="TextBox 86"/>
           <p:cNvSpPr txBox="1"/>
           <p:nvPr/>
         </p:nvSpPr>
@@ -6360,7 +6939,7 @@
       </p:sp>
       <p:sp>
         <p:nvSpPr>
-          <p:cNvPr id="72" name="TextBox 71"/>
+          <p:cNvPr id="88" name="TextBox 87"/>
           <p:cNvSpPr txBox="1"/>
           <p:nvPr/>
         </p:nvSpPr>
@@ -6399,7 +6978,7 @@
       </p:sp>
       <p:sp>
         <p:nvSpPr>
-          <p:cNvPr id="73" name="TextBox 72"/>
+          <p:cNvPr id="89" name="TextBox 88"/>
           <p:cNvSpPr txBox="1"/>
           <p:nvPr/>
         </p:nvSpPr>
@@ -6438,7 +7017,7 @@
       </p:sp>
       <p:sp>
         <p:nvSpPr>
-          <p:cNvPr id="74" name="TextBox 73"/>
+          <p:cNvPr id="90" name="TextBox 89"/>
           <p:cNvSpPr txBox="1"/>
           <p:nvPr/>
         </p:nvSpPr>
@@ -6477,7 +7056,7 @@
       </p:sp>
       <p:sp>
         <p:nvSpPr>
-          <p:cNvPr id="75" name="Rounded Rectangle 74"/>
+          <p:cNvPr id="91" name="Rounded Rectangle 90"/>
           <p:cNvSpPr/>
           <p:nvPr/>
         </p:nvSpPr>
@@ -6523,7 +7102,7 @@
       </p:sp>
       <p:sp>
         <p:nvSpPr>
-          <p:cNvPr id="76" name="TextBox 75"/>
+          <p:cNvPr id="92" name="TextBox 91"/>
           <p:cNvSpPr txBox="1"/>
           <p:nvPr/>
         </p:nvSpPr>
@@ -6562,7 +7141,7 @@
       </p:sp>
       <p:sp>
         <p:nvSpPr>
-          <p:cNvPr id="77" name="Rounded Rectangle 76"/>
+          <p:cNvPr id="93" name="Rounded Rectangle 92"/>
           <p:cNvSpPr/>
           <p:nvPr/>
         </p:nvSpPr>
@@ -6619,7 +7198,7 @@
       </p:sp>
       <p:sp>
         <p:nvSpPr>
-          <p:cNvPr id="78" name="Rounded Rectangle 77"/>
+          <p:cNvPr id="94" name="Rounded Rectangle 93"/>
           <p:cNvSpPr/>
           <p:nvPr/>
         </p:nvSpPr>
@@ -6676,7 +7255,7 @@
       </p:sp>
       <p:sp>
         <p:nvSpPr>
-          <p:cNvPr id="79" name="Rounded Rectangle 78"/>
+          <p:cNvPr id="95" name="Rounded Rectangle 94"/>
           <p:cNvSpPr/>
           <p:nvPr/>
         </p:nvSpPr>
@@ -6733,7 +7312,7 @@
       </p:sp>
       <p:sp>
         <p:nvSpPr>
-          <p:cNvPr id="80" name="Rounded Rectangle 79"/>
+          <p:cNvPr id="96" name="Rounded Rectangle 95"/>
           <p:cNvSpPr/>
           <p:nvPr/>
         </p:nvSpPr>
@@ -6790,7 +7369,7 @@
       </p:sp>
       <p:sp>
         <p:nvSpPr>
-          <p:cNvPr id="81" name="Rounded Rectangle 80"/>
+          <p:cNvPr id="97" name="Rounded Rectangle 96"/>
           <p:cNvSpPr/>
           <p:nvPr/>
         </p:nvSpPr>
@@ -6847,7 +7426,7 @@
       </p:sp>
       <p:sp>
         <p:nvSpPr>
-          <p:cNvPr id="82" name="TextBox 81"/>
+          <p:cNvPr id="98" name="TextBox 97"/>
           <p:cNvSpPr txBox="1"/>
           <p:nvPr/>
         </p:nvSpPr>
@@ -6895,7 +7474,7 @@
       </p:sp>
       <p:sp>
         <p:nvSpPr>
-          <p:cNvPr id="98" name="Rounded Rectangle 97"/>
+          <p:cNvPr id="114" name="Rounded Rectangle 113"/>
           <p:cNvSpPr/>
           <p:nvPr/>
         </p:nvSpPr>
@@ -6943,7 +7522,7 @@
       </p:sp>
       <p:sp>
         <p:nvSpPr>
-          <p:cNvPr id="99" name="Rounded Rectangle 98"/>
+          <p:cNvPr id="115" name="Rounded Rectangle 114"/>
           <p:cNvSpPr/>
           <p:nvPr/>
         </p:nvSpPr>
@@ -6998,7 +7577,7 @@
       </p:sp>
       <p:sp>
         <p:nvSpPr>
-          <p:cNvPr id="85" name="TextBox 84"/>
+          <p:cNvPr id="101" name="TextBox 100"/>
           <p:cNvSpPr txBox="1"/>
           <p:nvPr/>
         </p:nvSpPr>
@@ -7046,7 +7625,7 @@
       </p:sp>
       <p:sp>
         <p:nvSpPr>
-          <p:cNvPr id="86" name="Rounded Rectangle 85"/>
+          <p:cNvPr id="102" name="Rounded Rectangle 101"/>
           <p:cNvSpPr/>
           <p:nvPr/>
         </p:nvSpPr>
@@ -7092,7 +7671,7 @@
       </p:sp>
       <p:sp>
         <p:nvSpPr>
-          <p:cNvPr id="87" name="TextBox 86"/>
+          <p:cNvPr id="103" name="TextBox 102"/>
           <p:cNvSpPr txBox="1"/>
           <p:nvPr/>
         </p:nvSpPr>
@@ -7131,7 +7710,7 @@
       </p:sp>
       <p:sp>
         <p:nvSpPr>
-          <p:cNvPr id="88" name="Rounded Rectangle 87"/>
+          <p:cNvPr id="104" name="Rounded Rectangle 103"/>
           <p:cNvSpPr/>
           <p:nvPr/>
         </p:nvSpPr>
@@ -7177,7 +7756,7 @@
       </p:sp>
       <p:sp>
         <p:nvSpPr>
-          <p:cNvPr id="89" name="TextBox 88"/>
+          <p:cNvPr id="105" name="TextBox 104"/>
           <p:cNvSpPr txBox="1"/>
           <p:nvPr/>
         </p:nvSpPr>
@@ -7235,7 +7814,7 @@
       </p:sp>
       <p:pic>
         <p:nvPicPr>
-          <p:cNvPr id="90" name="Picture 89" descr="map.png"/>
+          <p:cNvPr id="106" name="Picture 105" descr="map.png"/>
           <p:cNvPicPr>
             <a:picLocks noChangeAspect="1"/>
           </p:cNvPicPr>
@@ -7259,7 +7838,7 @@
       </p:pic>
       <p:sp>
         <p:nvSpPr>
-          <p:cNvPr id="91" name="Rectangle 90"/>
+          <p:cNvPr id="107" name="Rectangle 106"/>
           <p:cNvSpPr/>
           <p:nvPr/>
         </p:nvSpPr>
@@ -7303,7 +7882,7 @@
       </p:sp>
       <p:sp>
         <p:nvSpPr>
-          <p:cNvPr id="92" name="TextBox 91"/>
+          <p:cNvPr id="108" name="TextBox 107"/>
           <p:cNvSpPr txBox="1"/>
           <p:nvPr/>
         </p:nvSpPr>
@@ -7342,7 +7921,7 @@
       </p:sp>
       <p:sp>
         <p:nvSpPr>
-          <p:cNvPr id="93" name="TextBox 92"/>
+          <p:cNvPr id="109" name="TextBox 108"/>
           <p:cNvSpPr txBox="1"/>
           <p:nvPr/>
         </p:nvSpPr>
@@ -7381,7 +7960,7 @@
       </p:sp>
       <p:sp>
         <p:nvSpPr>
-          <p:cNvPr id="94" name="TextBox 93"/>
+          <p:cNvPr id="110" name="TextBox 109"/>
           <p:cNvSpPr txBox="1"/>
           <p:nvPr/>
         </p:nvSpPr>
@@ -7420,7 +7999,7 @@
       </p:sp>
       <p:sp>
         <p:nvSpPr>
-          <p:cNvPr id="95" name="TextBox 94"/>
+          <p:cNvPr id="111" name="TextBox 110"/>
           <p:cNvSpPr txBox="1"/>
           <p:nvPr/>
         </p:nvSpPr>
@@ -7459,7 +8038,7 @@
       </p:sp>
       <p:sp>
         <p:nvSpPr>
-          <p:cNvPr id="96" name="TextBox 95"/>
+          <p:cNvPr id="112" name="TextBox 111"/>
           <p:cNvSpPr txBox="1"/>
           <p:nvPr/>
         </p:nvSpPr>
@@ -7507,7 +8086,7 @@
       </p:sp>
       <p:sp>
         <p:nvSpPr>
-          <p:cNvPr id="97" name="TextBox 96"/>
+          <p:cNvPr id="113" name="TextBox 112"/>
           <p:cNvSpPr txBox="1"/>
           <p:nvPr/>
         </p:nvSpPr>
@@ -7555,7 +8134,7 @@
       </p:sp>
       <p:sp>
         <p:nvSpPr>
-          <p:cNvPr id="116" name="Rounded Rectangle 115"/>
+          <p:cNvPr id="132" name="Rounded Rectangle 131"/>
           <p:cNvSpPr/>
           <p:nvPr/>
         </p:nvSpPr>
@@ -7603,7 +8182,7 @@
       </p:sp>
       <p:sp>
         <p:nvSpPr>
-          <p:cNvPr id="117" name="Rounded Rectangle 116"/>
+          <p:cNvPr id="133" name="Rounded Rectangle 132"/>
           <p:cNvSpPr/>
           <p:nvPr/>
         </p:nvSpPr>
@@ -7658,7 +8237,7 @@
       </p:sp>
       <p:sp>
         <p:nvSpPr>
-          <p:cNvPr id="100" name="Rounded Rectangle 99"/>
+          <p:cNvPr id="116" name="Rounded Rectangle 115"/>
           <p:cNvSpPr/>
           <p:nvPr/>
         </p:nvSpPr>
@@ -7725,7 +8304,7 @@
       </p:sp>
       <p:sp>
         <p:nvSpPr>
-          <p:cNvPr id="101" name="TextBox 100"/>
+          <p:cNvPr id="117" name="TextBox 116"/>
           <p:cNvSpPr txBox="1"/>
           <p:nvPr/>
         </p:nvSpPr>
@@ -7764,7 +8343,7 @@
       </p:sp>
       <p:sp>
         <p:nvSpPr>
-          <p:cNvPr id="102" name="Rounded Rectangle 101"/>
+          <p:cNvPr id="118" name="Rounded Rectangle 117"/>
           <p:cNvSpPr/>
           <p:nvPr/>
         </p:nvSpPr>
@@ -7831,7 +8410,7 @@
       </p:sp>
       <p:sp>
         <p:nvSpPr>
-          <p:cNvPr id="103" name="TextBox 102"/>
+          <p:cNvPr id="119" name="TextBox 118"/>
           <p:cNvSpPr txBox="1"/>
           <p:nvPr/>
         </p:nvSpPr>
@@ -7870,7 +8449,7 @@
       </p:sp>
       <p:sp>
         <p:nvSpPr>
-          <p:cNvPr id="104" name="Rounded Rectangle 103"/>
+          <p:cNvPr id="120" name="Rounded Rectangle 119"/>
           <p:cNvSpPr/>
           <p:nvPr/>
         </p:nvSpPr>
@@ -7925,7 +8504,7 @@
       </p:sp>
       <p:sp>
         <p:nvSpPr>
-          <p:cNvPr id="105" name="TextBox 104"/>
+          <p:cNvPr id="121" name="TextBox 120"/>
           <p:cNvSpPr txBox="1"/>
           <p:nvPr/>
         </p:nvSpPr>
@@ -7964,7 +8543,7 @@
       </p:sp>
       <p:sp>
         <p:nvSpPr>
-          <p:cNvPr id="106" name="Rounded Rectangle 105"/>
+          <p:cNvPr id="122" name="Rounded Rectangle 121"/>
           <p:cNvSpPr/>
           <p:nvPr/>
         </p:nvSpPr>
@@ -8031,7 +8610,7 @@
       </p:sp>
       <p:sp>
         <p:nvSpPr>
-          <p:cNvPr id="107" name="TextBox 106"/>
+          <p:cNvPr id="123" name="TextBox 122"/>
           <p:cNvSpPr txBox="1"/>
           <p:nvPr/>
         </p:nvSpPr>
@@ -8070,7 +8649,7 @@
       </p:sp>
       <p:sp>
         <p:nvSpPr>
-          <p:cNvPr id="108" name="Rounded Rectangle 107"/>
+          <p:cNvPr id="124" name="Rounded Rectangle 123"/>
           <p:cNvSpPr/>
           <p:nvPr/>
         </p:nvSpPr>
@@ -8137,7 +8716,7 @@
       </p:sp>
       <p:sp>
         <p:nvSpPr>
-          <p:cNvPr id="109" name="TextBox 108"/>
+          <p:cNvPr id="125" name="TextBox 124"/>
           <p:cNvSpPr txBox="1"/>
           <p:nvPr/>
         </p:nvSpPr>
@@ -8176,7 +8755,7 @@
       </p:sp>
       <p:sp>
         <p:nvSpPr>
-          <p:cNvPr id="110" name="Oval 109"/>
+          <p:cNvPr id="126" name="Oval 125"/>
           <p:cNvSpPr/>
           <p:nvPr/>
         </p:nvSpPr>
@@ -8220,7 +8799,7 @@
       </p:sp>
       <p:sp>
         <p:nvSpPr>
-          <p:cNvPr id="111" name="TextBox 110"/>
+          <p:cNvPr id="127" name="TextBox 126"/>
           <p:cNvSpPr txBox="1"/>
           <p:nvPr/>
         </p:nvSpPr>
@@ -8268,7 +8847,7 @@
       </p:sp>
       <p:sp>
         <p:nvSpPr>
-          <p:cNvPr id="112" name="Oval 111"/>
+          <p:cNvPr id="128" name="Oval 127"/>
           <p:cNvSpPr/>
           <p:nvPr/>
         </p:nvSpPr>
@@ -8312,7 +8891,7 @@
       </p:sp>
       <p:sp>
         <p:nvSpPr>
-          <p:cNvPr id="113" name="TextBox 112"/>
+          <p:cNvPr id="129" name="TextBox 128"/>
           <p:cNvSpPr txBox="1"/>
           <p:nvPr/>
         </p:nvSpPr>
@@ -8360,7 +8939,7 @@
       </p:sp>
       <p:sp>
         <p:nvSpPr>
-          <p:cNvPr id="114" name="Oval 113"/>
+          <p:cNvPr id="130" name="Oval 129"/>
           <p:cNvSpPr/>
           <p:nvPr/>
         </p:nvSpPr>
@@ -8404,7 +8983,7 @@
       </p:sp>
       <p:sp>
         <p:nvSpPr>
-          <p:cNvPr id="115" name="TextBox 114"/>
+          <p:cNvPr id="131" name="TextBox 130"/>
           <p:cNvSpPr txBox="1"/>
           <p:nvPr/>
         </p:nvSpPr>
@@ -8452,7 +9031,7 @@
       </p:sp>
       <p:sp>
         <p:nvSpPr>
-          <p:cNvPr id="134" name="Rounded Rectangle 133"/>
+          <p:cNvPr id="150" name="Rounded Rectangle 149"/>
           <p:cNvSpPr/>
           <p:nvPr/>
         </p:nvSpPr>
@@ -8500,7 +9079,7 @@
       </p:sp>
       <p:sp>
         <p:nvSpPr>
-          <p:cNvPr id="135" name="Rounded Rectangle 134"/>
+          <p:cNvPr id="151" name="Rounded Rectangle 150"/>
           <p:cNvSpPr/>
           <p:nvPr/>
         </p:nvSpPr>
@@ -8555,7 +9134,7 @@
       </p:sp>
       <p:sp>
         <p:nvSpPr>
-          <p:cNvPr id="118" name="Rounded Rectangle 117"/>
+          <p:cNvPr id="134" name="Rounded Rectangle 133"/>
           <p:cNvSpPr/>
           <p:nvPr/>
         </p:nvSpPr>
@@ -8601,7 +9180,7 @@
       </p:sp>
       <p:sp>
         <p:nvSpPr>
-          <p:cNvPr id="119" name="TextBox 118"/>
+          <p:cNvPr id="135" name="TextBox 134"/>
           <p:cNvSpPr txBox="1"/>
           <p:nvPr/>
         </p:nvSpPr>
@@ -8640,7 +9219,7 @@
       </p:sp>
       <p:sp>
         <p:nvSpPr>
-          <p:cNvPr id="120" name="TextBox 119"/>
+          <p:cNvPr id="136" name="TextBox 135"/>
           <p:cNvSpPr txBox="1"/>
           <p:nvPr/>
         </p:nvSpPr>
@@ -8679,7 +9258,7 @@
       </p:sp>
       <p:sp>
         <p:nvSpPr>
-          <p:cNvPr id="121" name="Rounded Rectangle 120"/>
+          <p:cNvPr id="137" name="Rounded Rectangle 136"/>
           <p:cNvSpPr/>
           <p:nvPr/>
         </p:nvSpPr>
@@ -8725,7 +9304,7 @@
       </p:sp>
       <p:sp>
         <p:nvSpPr>
-          <p:cNvPr id="122" name="TextBox 121"/>
+          <p:cNvPr id="138" name="TextBox 137"/>
           <p:cNvSpPr txBox="1"/>
           <p:nvPr/>
         </p:nvSpPr>
@@ -8764,7 +9343,7 @@
       </p:sp>
       <p:sp>
         <p:nvSpPr>
-          <p:cNvPr id="123" name="TextBox 122"/>
+          <p:cNvPr id="139" name="TextBox 138"/>
           <p:cNvSpPr txBox="1"/>
           <p:nvPr/>
         </p:nvSpPr>
@@ -8803,7 +9382,7 @@
       </p:sp>
       <p:sp>
         <p:nvSpPr>
-          <p:cNvPr id="124" name="Rounded Rectangle 123"/>
+          <p:cNvPr id="140" name="Rounded Rectangle 139"/>
           <p:cNvSpPr/>
           <p:nvPr/>
         </p:nvSpPr>
@@ -8849,7 +9428,7 @@
       </p:sp>
       <p:sp>
         <p:nvSpPr>
-          <p:cNvPr id="125" name="TextBox 124"/>
+          <p:cNvPr id="141" name="TextBox 140"/>
           <p:cNvSpPr txBox="1"/>
           <p:nvPr/>
         </p:nvSpPr>
@@ -8888,7 +9467,7 @@
       </p:sp>
       <p:sp>
         <p:nvSpPr>
-          <p:cNvPr id="126" name="TextBox 125"/>
+          <p:cNvPr id="142" name="TextBox 141"/>
           <p:cNvSpPr txBox="1"/>
           <p:nvPr/>
         </p:nvSpPr>
@@ -8927,7 +9506,7 @@
       </p:sp>
       <p:sp>
         <p:nvSpPr>
-          <p:cNvPr id="127" name="Rounded Rectangle 126"/>
+          <p:cNvPr id="143" name="Rounded Rectangle 142"/>
           <p:cNvSpPr/>
           <p:nvPr/>
         </p:nvSpPr>
@@ -8973,7 +9552,7 @@
       </p:sp>
       <p:sp>
         <p:nvSpPr>
-          <p:cNvPr id="128" name="TextBox 127"/>
+          <p:cNvPr id="144" name="TextBox 143"/>
           <p:cNvSpPr txBox="1"/>
           <p:nvPr/>
         </p:nvSpPr>
@@ -9012,7 +9591,7 @@
       </p:sp>
       <p:sp>
         <p:nvSpPr>
-          <p:cNvPr id="129" name="TextBox 128"/>
+          <p:cNvPr id="145" name="TextBox 144"/>
           <p:cNvSpPr txBox="1"/>
           <p:nvPr/>
         </p:nvSpPr>
@@ -9051,7 +9630,7 @@
       </p:sp>
       <p:sp>
         <p:nvSpPr>
-          <p:cNvPr id="130" name="Rounded Rectangle 129"/>
+          <p:cNvPr id="146" name="Rounded Rectangle 145"/>
           <p:cNvSpPr/>
           <p:nvPr/>
         </p:nvSpPr>
@@ -9097,7 +9676,7 @@
       </p:sp>
       <p:sp>
         <p:nvSpPr>
-          <p:cNvPr id="131" name="TextBox 130"/>
+          <p:cNvPr id="147" name="TextBox 146"/>
           <p:cNvSpPr txBox="1"/>
           <p:nvPr/>
         </p:nvSpPr>
@@ -9136,7 +9715,7 @@
       </p:sp>
       <p:sp>
         <p:nvSpPr>
-          <p:cNvPr id="132" name="TextBox 131"/>
+          <p:cNvPr id="148" name="TextBox 147"/>
           <p:cNvSpPr txBox="1"/>
           <p:nvPr/>
         </p:nvSpPr>
@@ -9175,7 +9754,7 @@
       </p:sp>
       <p:sp>
         <p:nvSpPr>
-          <p:cNvPr id="133" name="TextBox 132"/>
+          <p:cNvPr id="149" name="TextBox 148"/>
           <p:cNvSpPr txBox="1"/>
           <p:nvPr/>
         </p:nvSpPr>

--- a/포스터/Mars-Fit_포스터.pptx
+++ b/포스터/Mars-Fit_포스터.pptx
@@ -5292,7 +5292,7 @@
                 </a:solidFill>
                 <a:latin typeface="맑은 고딕"/>
               </a:rPr>
-              <a:t>오늘 74건</a:t>
+              <a:t>2026-09-11 · 74건</a:t>
             </a:r>
           </a:p>
         </p:txBody>
@@ -6283,7 +6283,7 @@
                 </a:solidFill>
                 <a:latin typeface="맑은 고딕"/>
               </a:rPr>
-              <a:t>오늘 74건에서 조건 309개를 판정했다</a:t>
+              <a:t>2026-09-11 기준 74건에서 조건 309개를 판정했다</a:t>
             </a:r>
             <a:r>
               <a:rPr sz="2318" b="0">
@@ -6334,7 +6334,7 @@
         <p:spPr>
           <a:xfrm>
             <a:off x="16560000" y="6319800"/>
-            <a:ext cx="15408000" cy="11833117"/>
+            <a:ext cx="15408000" cy="11704045"/>
           </a:xfrm>
           <a:prstGeom prst="roundRect">
             <a:avLst>
@@ -6471,7 +6471,7 @@
                 </a:solidFill>
                 <a:latin typeface="맑은 고딕"/>
               </a:rPr>
-              <a:t> 판정이 끝나면 「그래서 뭘 내야 하나」가 남는다. 공고마다 낼 서류가 다르고, 오늘 74건에 서류가 195개 · 52종 붙어 있다.</a:t>
+              <a:t> 판정이 끝나면 「그래서 뭘 내야 하나」가 남는다. 공고마다 서류가 다르고 2026-09-11 기준 74건에 195개 · 52종이 붙어 있다.</a:t>
             </a:r>
           </a:p>
         </p:txBody>
@@ -6493,7 +6493,7 @@
         <p:spPr>
           <a:xfrm>
             <a:off x="17064000" y="8495582"/>
-            <a:ext cx="5432870" cy="6408000"/>
+            <a:ext cx="5188696" cy="6120000"/>
           </a:xfrm>
           <a:prstGeom prst="rect">
             <a:avLst/>
@@ -6509,7 +6509,7 @@
         <p:spPr>
           <a:xfrm>
             <a:off x="17064000" y="8495582"/>
-            <a:ext cx="5432869" cy="6408000"/>
+            <a:ext cx="5188696" cy="6120000"/>
           </a:xfrm>
           <a:prstGeom prst="rect">
             <a:avLst/>
@@ -6552,8 +6552,8 @@
         </p:nvSpPr>
         <p:spPr>
           <a:xfrm>
-            <a:off x="23072869" y="8459582"/>
-            <a:ext cx="8391130" cy="403053"/>
+            <a:off x="22828696" y="8459582"/>
+            <a:ext cx="8635304" cy="403053"/>
           </a:xfrm>
           <a:prstGeom prst="rect">
             <a:avLst/>
@@ -6591,7 +6591,7 @@
         </p:nvSpPr>
         <p:spPr>
           <a:xfrm>
-            <a:off x="23072869" y="9006636"/>
+            <a:off x="22828696" y="9006636"/>
             <a:ext cx="324000" cy="324000"/>
           </a:xfrm>
           <a:prstGeom prst="ellipse">
@@ -6644,8 +6644,8 @@
         </p:nvSpPr>
         <p:spPr>
           <a:xfrm>
-            <a:off x="23540869" y="8898636"/>
-            <a:ext cx="7923130" cy="364667"/>
+            <a:off x="23296696" y="8898636"/>
+            <a:ext cx="8167304" cy="364667"/>
           </a:xfrm>
           <a:prstGeom prst="rect">
             <a:avLst/>
@@ -6683,8 +6683,8 @@
         </p:nvSpPr>
         <p:spPr>
           <a:xfrm>
-            <a:off x="23540869" y="9335303"/>
-            <a:ext cx="7923130" cy="978845"/>
+            <a:off x="23296696" y="9335303"/>
+            <a:ext cx="8167304" cy="978845"/>
           </a:xfrm>
           <a:prstGeom prst="rect">
             <a:avLst/>
@@ -6722,7 +6722,7 @@
         </p:nvSpPr>
         <p:spPr>
           <a:xfrm>
-            <a:off x="23072869" y="10674149"/>
+            <a:off x="22828696" y="10674149"/>
             <a:ext cx="324000" cy="324000"/>
           </a:xfrm>
           <a:prstGeom prst="ellipse">
@@ -6775,8 +6775,8 @@
         </p:nvSpPr>
         <p:spPr>
           <a:xfrm>
-            <a:off x="23540869" y="10566149"/>
-            <a:ext cx="7923130" cy="364667"/>
+            <a:off x="23296696" y="10566149"/>
+            <a:ext cx="8167304" cy="364667"/>
           </a:xfrm>
           <a:prstGeom prst="rect">
             <a:avLst/>
@@ -6814,8 +6814,8 @@
         </p:nvSpPr>
         <p:spPr>
           <a:xfrm>
-            <a:off x="23540869" y="11002816"/>
-            <a:ext cx="7923130" cy="978845"/>
+            <a:off x="23296696" y="11002816"/>
+            <a:ext cx="8167304" cy="978845"/>
           </a:xfrm>
           <a:prstGeom prst="rect">
             <a:avLst/>
@@ -6853,7 +6853,7 @@
         </p:nvSpPr>
         <p:spPr>
           <a:xfrm>
-            <a:off x="23072869" y="12341661"/>
+            <a:off x="22828696" y="12341661"/>
             <a:ext cx="324000" cy="324000"/>
           </a:xfrm>
           <a:prstGeom prst="ellipse">
@@ -6906,8 +6906,8 @@
         </p:nvSpPr>
         <p:spPr>
           <a:xfrm>
-            <a:off x="23540869" y="12233661"/>
-            <a:ext cx="7923130" cy="364667"/>
+            <a:off x="23296696" y="12233661"/>
+            <a:ext cx="8167304" cy="364667"/>
           </a:xfrm>
           <a:prstGeom prst="rect">
             <a:avLst/>
@@ -6945,8 +6945,8 @@
         </p:nvSpPr>
         <p:spPr>
           <a:xfrm>
-            <a:off x="23540869" y="12670329"/>
-            <a:ext cx="7923130" cy="652563"/>
+            <a:off x="23296696" y="12670329"/>
+            <a:ext cx="8167304" cy="652563"/>
           </a:xfrm>
           <a:prstGeom prst="rect">
             <a:avLst/>
@@ -6984,8 +6984,8 @@
         </p:nvSpPr>
         <p:spPr>
           <a:xfrm>
-            <a:off x="23072869" y="13610892"/>
-            <a:ext cx="8391130" cy="403053"/>
+            <a:off x="22828696" y="13610892"/>
+            <a:ext cx="8635304" cy="403053"/>
           </a:xfrm>
           <a:prstGeom prst="rect">
             <a:avLst/>
@@ -7023,8 +7023,8 @@
         </p:nvSpPr>
         <p:spPr>
           <a:xfrm>
-            <a:off x="23072869" y="14121946"/>
-            <a:ext cx="8391130" cy="652563"/>
+            <a:off x="22828696" y="14121946"/>
+            <a:ext cx="8635304" cy="652563"/>
           </a:xfrm>
           <a:prstGeom prst="rect">
             <a:avLst/>
@@ -7062,7 +7062,7 @@
         </p:nvSpPr>
         <p:spPr>
           <a:xfrm>
-            <a:off x="17064000" y="15263582"/>
+            <a:off x="17064000" y="15134510"/>
             <a:ext cx="14400000" cy="1512000"/>
           </a:xfrm>
           <a:prstGeom prst="roundRect">
@@ -7108,7 +7108,7 @@
         </p:nvSpPr>
         <p:spPr>
           <a:xfrm>
-            <a:off x="17352000" y="15443582"/>
+            <a:off x="17352000" y="15314510"/>
             <a:ext cx="13824000" cy="504000"/>
           </a:xfrm>
           <a:prstGeom prst="rect">
@@ -7147,7 +7147,7 @@
         </p:nvSpPr>
         <p:spPr>
           <a:xfrm>
-            <a:off x="17352000" y="16019582"/>
+            <a:off x="17352000" y="15890510"/>
             <a:ext cx="2620800" cy="540000"/>
           </a:xfrm>
           <a:prstGeom prst="roundRect">
@@ -7204,7 +7204,7 @@
         </p:nvSpPr>
         <p:spPr>
           <a:xfrm>
-            <a:off x="20152800" y="16019582"/>
+            <a:off x="20152800" y="15890510"/>
             <a:ext cx="2620800" cy="540000"/>
           </a:xfrm>
           <a:prstGeom prst="roundRect">
@@ -7261,7 +7261,7 @@
         </p:nvSpPr>
         <p:spPr>
           <a:xfrm>
-            <a:off x="22953599" y="16019582"/>
+            <a:off x="22953599" y="15890510"/>
             <a:ext cx="2620800" cy="540000"/>
           </a:xfrm>
           <a:prstGeom prst="roundRect">
@@ -7318,7 +7318,7 @@
         </p:nvSpPr>
         <p:spPr>
           <a:xfrm>
-            <a:off x="25754399" y="16019582"/>
+            <a:off x="25754399" y="15890510"/>
             <a:ext cx="2620800" cy="540000"/>
           </a:xfrm>
           <a:prstGeom prst="roundRect">
@@ -7375,7 +7375,7 @@
         </p:nvSpPr>
         <p:spPr>
           <a:xfrm>
-            <a:off x="28555199" y="16019582"/>
+            <a:off x="28555199" y="15890510"/>
             <a:ext cx="2620800" cy="540000"/>
           </a:xfrm>
           <a:prstGeom prst="roundRect">
@@ -7432,7 +7432,7 @@
         </p:nvSpPr>
         <p:spPr>
           <a:xfrm>
-            <a:off x="17064000" y="16919582"/>
+            <a:off x="17064000" y="16790510"/>
             <a:ext cx="14400000" cy="729335"/>
           </a:xfrm>
           <a:prstGeom prst="rect">
@@ -7480,8 +7480,8 @@
         </p:nvSpPr>
         <p:spPr>
           <a:xfrm>
-            <a:off x="16560000" y="19000717"/>
-            <a:ext cx="15408000" cy="11435441"/>
+            <a:off x="16560000" y="18799645"/>
+            <a:ext cx="15408000" cy="11089967"/>
           </a:xfrm>
           <a:prstGeom prst="roundRect">
             <a:avLst>
@@ -7528,7 +7528,7 @@
         </p:nvSpPr>
         <p:spPr>
           <a:xfrm>
-            <a:off x="16848000" y="18584917"/>
+            <a:off x="16848000" y="18383845"/>
             <a:ext cx="7776000" cy="756000"/>
           </a:xfrm>
           <a:prstGeom prst="roundRect">
@@ -7583,7 +7583,7 @@
         </p:nvSpPr>
         <p:spPr>
           <a:xfrm>
-            <a:off x="17064000" y="19664917"/>
+            <a:off x="17064000" y="19463845"/>
             <a:ext cx="14400000" cy="767721"/>
           </a:xfrm>
           <a:prstGeom prst="rect">
@@ -7631,7 +7631,7 @@
         </p:nvSpPr>
         <p:spPr>
           <a:xfrm>
-            <a:off x="17064000" y="20720639"/>
+            <a:off x="17064000" y="20519567"/>
             <a:ext cx="14400000" cy="816768"/>
           </a:xfrm>
           <a:prstGeom prst="roundRect">
@@ -7677,7 +7677,7 @@
         </p:nvSpPr>
         <p:spPr>
           <a:xfrm>
-            <a:off x="17316000" y="20900639"/>
+            <a:off x="17316000" y="20699567"/>
             <a:ext cx="13896000" cy="456767"/>
           </a:xfrm>
           <a:prstGeom prst="rect">
@@ -7716,7 +7716,7 @@
         </p:nvSpPr>
         <p:spPr>
           <a:xfrm>
-            <a:off x="17064000" y="21717407"/>
+            <a:off x="17064000" y="21516335"/>
             <a:ext cx="14400000" cy="1227859"/>
           </a:xfrm>
           <a:prstGeom prst="roundRect">
@@ -7762,7 +7762,7 @@
         </p:nvSpPr>
         <p:spPr>
           <a:xfrm>
-            <a:off x="17316000" y="21897407"/>
+            <a:off x="17316000" y="21696335"/>
             <a:ext cx="13896000" cy="867859"/>
           </a:xfrm>
           <a:prstGeom prst="rect">
@@ -7828,8 +7828,8 @@
         </p:blipFill>
         <p:spPr>
           <a:xfrm>
-            <a:off x="17064000" y="23305266"/>
-            <a:ext cx="2794692" cy="6048000"/>
+            <a:off x="17064000" y="23104194"/>
+            <a:ext cx="2495261" cy="5400000"/>
           </a:xfrm>
           <a:prstGeom prst="rect">
             <a:avLst/>
@@ -7844,8 +7844,8 @@
         </p:nvSpPr>
         <p:spPr>
           <a:xfrm>
-            <a:off x="17064000" y="23305266"/>
-            <a:ext cx="2794691" cy="6048000"/>
+            <a:off x="17064000" y="23104194"/>
+            <a:ext cx="2495261" cy="5400000"/>
           </a:xfrm>
           <a:prstGeom prst="rect">
             <a:avLst/>
@@ -7888,8 +7888,8 @@
         </p:nvSpPr>
         <p:spPr>
           <a:xfrm>
-            <a:off x="20434692" y="23269266"/>
-            <a:ext cx="11029308" cy="383860"/>
+            <a:off x="20135261" y="23068194"/>
+            <a:ext cx="11328739" cy="383860"/>
           </a:xfrm>
           <a:prstGeom prst="rect">
             <a:avLst/>
@@ -7927,8 +7927,8 @@
         </p:nvSpPr>
         <p:spPr>
           <a:xfrm>
-            <a:off x="20434692" y="23833127"/>
-            <a:ext cx="11029308" cy="1036424"/>
+            <a:off x="20135261" y="23632055"/>
+            <a:ext cx="11328739" cy="690949"/>
           </a:xfrm>
           <a:prstGeom prst="rect">
             <a:avLst/>
@@ -7966,8 +7966,8 @@
         </p:nvSpPr>
         <p:spPr>
           <a:xfrm>
-            <a:off x="20434692" y="25265551"/>
-            <a:ext cx="11029308" cy="383860"/>
+            <a:off x="20135261" y="24719004"/>
+            <a:ext cx="11328739" cy="383860"/>
           </a:xfrm>
           <a:prstGeom prst="rect">
             <a:avLst/>
@@ -8005,8 +8005,8 @@
         </p:nvSpPr>
         <p:spPr>
           <a:xfrm>
-            <a:off x="20434692" y="25829412"/>
-            <a:ext cx="11029308" cy="1381898"/>
+            <a:off x="20135261" y="25282865"/>
+            <a:ext cx="11328739" cy="1381898"/>
           </a:xfrm>
           <a:prstGeom prst="rect">
             <a:avLst/>
@@ -8044,8 +8044,8 @@
         </p:nvSpPr>
         <p:spPr>
           <a:xfrm>
-            <a:off x="20434692" y="27535311"/>
-            <a:ext cx="11029308" cy="1036424"/>
+            <a:off x="20135261" y="26988764"/>
+            <a:ext cx="11328739" cy="1036424"/>
           </a:xfrm>
           <a:prstGeom prst="rect">
             <a:avLst/>
@@ -8079,7 +8079,7 @@
                 </a:solidFill>
                 <a:latin typeface="맑은 고딕"/>
               </a:rPr>
-              <a:t>같은 「10개」라도 카페는 붐비고 음식점은 한산하다. 카페 8·20, 음식점 15·40, 소매업 10·30 이 경계다.</a:t>
+              <a:t>카페는 「10개」면 붐비고 음식점은 한산하다. 카페 8·20, 음식점 15·40, 소매업 10·30 이 경계다.</a:t>
             </a:r>
           </a:p>
         </p:txBody>
@@ -8092,8 +8092,8 @@
         </p:nvSpPr>
         <p:spPr>
           <a:xfrm>
-            <a:off x="20434692" y="28895735"/>
-            <a:ext cx="11029308" cy="1036424"/>
+            <a:off x="20135261" y="28349188"/>
+            <a:ext cx="11328739" cy="1036424"/>
           </a:xfrm>
           <a:prstGeom prst="rect">
             <a:avLst/>
@@ -8127,7 +8127,7 @@
                 </a:solidFill>
                 <a:latin typeface="맑은 고딕"/>
               </a:rPr>
-              <a:t>상가 30,297 · 학교 188 · 지하철역 5 · 아파트 47개 행정동. 반경은 300 · 500 · 1000m 로 바꿔 볼 수 있다.</a:t>
+              <a:t>상가 30,297 · 학교 188 · 역 5 · 아파트 47개 행정동. 반경은 300 · 500 · 1000m 로 바꾼다.</a:t>
             </a:r>
           </a:p>
         </p:txBody>
@@ -8140,8 +8140,8 @@
         </p:nvSpPr>
         <p:spPr>
           <a:xfrm>
-            <a:off x="16560000" y="31283959"/>
-            <a:ext cx="15408000" cy="6420498"/>
+            <a:off x="16560000" y="30665412"/>
+            <a:ext cx="15408000" cy="6055830"/>
           </a:xfrm>
           <a:prstGeom prst="roundRect">
             <a:avLst>
@@ -8188,7 +8188,7 @@
         </p:nvSpPr>
         <p:spPr>
           <a:xfrm>
-            <a:off x="16848000" y="30868159"/>
+            <a:off x="16848000" y="30249612"/>
             <a:ext cx="7776000" cy="756000"/>
           </a:xfrm>
           <a:prstGeom prst="roundRect">
@@ -8243,7 +8243,7 @@
         </p:nvSpPr>
         <p:spPr>
           <a:xfrm>
-            <a:off x="17064000" y="31948159"/>
+            <a:off x="17064000" y="31329612"/>
             <a:ext cx="2620800" cy="1044000"/>
           </a:xfrm>
           <a:prstGeom prst="roundRect">
@@ -8310,7 +8310,7 @@
         </p:nvSpPr>
         <p:spPr>
           <a:xfrm>
-            <a:off x="19684800" y="32038159"/>
+            <a:off x="19684800" y="31419612"/>
             <a:ext cx="324000" cy="828000"/>
           </a:xfrm>
           <a:prstGeom prst="rect">
@@ -8349,7 +8349,7 @@
         </p:nvSpPr>
         <p:spPr>
           <a:xfrm>
-            <a:off x="20008800" y="31948159"/>
+            <a:off x="20008800" y="31329612"/>
             <a:ext cx="2620800" cy="1044000"/>
           </a:xfrm>
           <a:prstGeom prst="roundRect">
@@ -8416,7 +8416,7 @@
         </p:nvSpPr>
         <p:spPr>
           <a:xfrm>
-            <a:off x="22629599" y="32038159"/>
+            <a:off x="22629599" y="31419612"/>
             <a:ext cx="324000" cy="828000"/>
           </a:xfrm>
           <a:prstGeom prst="rect">
@@ -8455,7 +8455,7 @@
         </p:nvSpPr>
         <p:spPr>
           <a:xfrm>
-            <a:off x="22953599" y="31948159"/>
+            <a:off x="22953599" y="31329612"/>
             <a:ext cx="2620800" cy="1044000"/>
           </a:xfrm>
           <a:prstGeom prst="roundRect">
@@ -8510,7 +8510,7 @@
         </p:nvSpPr>
         <p:spPr>
           <a:xfrm>
-            <a:off x="25574399" y="32038159"/>
+            <a:off x="25574399" y="31419612"/>
             <a:ext cx="324000" cy="828000"/>
           </a:xfrm>
           <a:prstGeom prst="rect">
@@ -8549,7 +8549,7 @@
         </p:nvSpPr>
         <p:spPr>
           <a:xfrm>
-            <a:off x="25898399" y="31948159"/>
+            <a:off x="25898399" y="31329612"/>
             <a:ext cx="2620800" cy="1044000"/>
           </a:xfrm>
           <a:prstGeom prst="roundRect">
@@ -8616,7 +8616,7 @@
         </p:nvSpPr>
         <p:spPr>
           <a:xfrm>
-            <a:off x="28519199" y="32038159"/>
+            <a:off x="28519199" y="31419612"/>
             <a:ext cx="324000" cy="828000"/>
           </a:xfrm>
           <a:prstGeom prst="rect">
@@ -8655,7 +8655,7 @@
         </p:nvSpPr>
         <p:spPr>
           <a:xfrm>
-            <a:off x="28843199" y="31948159"/>
+            <a:off x="28843199" y="31329612"/>
             <a:ext cx="2620800" cy="1044000"/>
           </a:xfrm>
           <a:prstGeom prst="roundRect">
@@ -8722,7 +8722,7 @@
         </p:nvSpPr>
         <p:spPr>
           <a:xfrm>
-            <a:off x="17064000" y="33208159"/>
+            <a:off x="17064000" y="32589612"/>
             <a:ext cx="14400000" cy="307088"/>
           </a:xfrm>
           <a:prstGeom prst="rect">
@@ -8761,7 +8761,7 @@
         </p:nvSpPr>
         <p:spPr>
           <a:xfrm>
-            <a:off x="17114400" y="33925648"/>
+            <a:off x="17114400" y="33307101"/>
             <a:ext cx="108000" cy="108000"/>
           </a:xfrm>
           <a:prstGeom prst="ellipse">
@@ -8805,7 +8805,7 @@
         </p:nvSpPr>
         <p:spPr>
           <a:xfrm>
-            <a:off x="17388000" y="33803248"/>
+            <a:off x="17388000" y="33184701"/>
             <a:ext cx="14076000" cy="1458671"/>
           </a:xfrm>
           <a:prstGeom prst="rect">
@@ -8853,7 +8853,7 @@
         </p:nvSpPr>
         <p:spPr>
           <a:xfrm>
-            <a:off x="17114400" y="35441919"/>
+            <a:off x="17114400" y="34823372"/>
             <a:ext cx="108000" cy="108000"/>
           </a:xfrm>
           <a:prstGeom prst="ellipse">
@@ -8897,8 +8897,8 @@
         </p:nvSpPr>
         <p:spPr>
           <a:xfrm>
-            <a:off x="17388000" y="35319519"/>
-            <a:ext cx="14076000" cy="1094003"/>
+            <a:off x="17388000" y="34700972"/>
+            <a:ext cx="14076000" cy="729335"/>
           </a:xfrm>
           <a:prstGeom prst="rect">
             <a:avLst/>
@@ -8932,7 +8932,7 @@
                 </a:solidFill>
                 <a:latin typeface="맑은 고딕"/>
               </a:rPr>
-              <a:t> 마감된 공고가 빠지면 딸린 서류도 같이 빠져 「데이터가 깎였다」로 잘못 읽힌다. 양쪽에 다 있는 공고만 골라 [서류·조건·본문]을 견준다.</a:t>
+              <a:t> 마감된 공고가 빠지면 딸린 서류도 같이 빠져 「깎였다」로 잘못 읽힌다. 양쪽에 다 있는 공고만 골라 [서류·조건·본문]을 견준다.</a:t>
             </a:r>
           </a:p>
         </p:txBody>
@@ -8945,7 +8945,7 @@
         </p:nvSpPr>
         <p:spPr>
           <a:xfrm>
-            <a:off x="17114400" y="36593522"/>
+            <a:off x="17114400" y="35610307"/>
             <a:ext cx="108000" cy="108000"/>
           </a:xfrm>
           <a:prstGeom prst="ellipse">
@@ -8989,7 +8989,7 @@
         </p:nvSpPr>
         <p:spPr>
           <a:xfrm>
-            <a:off x="17388000" y="36471122"/>
+            <a:off x="17388000" y="35487907"/>
             <a:ext cx="14076000" cy="729335"/>
           </a:xfrm>
           <a:prstGeom prst="rect">
@@ -9031,14 +9031,14 @@
       </p:sp>
       <p:sp>
         <p:nvSpPr>
-          <p:cNvPr id="150" name="Rounded Rectangle 149"/>
+          <p:cNvPr id="151" name="Rounded Rectangle 150"/>
           <p:cNvSpPr/>
           <p:nvPr/>
         </p:nvSpPr>
         <p:spPr>
           <a:xfrm>
-            <a:off x="16560000" y="38552258"/>
-            <a:ext cx="15408000" cy="2987288"/>
+            <a:off x="16560000" y="37497043"/>
+            <a:ext cx="15408000" cy="4059712"/>
           </a:xfrm>
           <a:prstGeom prst="roundRect">
             <a:avLst>
@@ -9079,13 +9079,13 @@
       </p:sp>
       <p:sp>
         <p:nvSpPr>
-          <p:cNvPr id="151" name="Rounded Rectangle 150"/>
+          <p:cNvPr id="152" name="Rounded Rectangle 151"/>
           <p:cNvSpPr/>
           <p:nvPr/>
         </p:nvSpPr>
         <p:spPr>
           <a:xfrm>
-            <a:off x="16848000" y="38136458"/>
+            <a:off x="16848000" y="37081243"/>
             <a:ext cx="7776000" cy="756000"/>
           </a:xfrm>
           <a:prstGeom prst="roundRect">
@@ -9140,8 +9140,8 @@
         </p:nvSpPr>
         <p:spPr>
           <a:xfrm>
-            <a:off x="17064000" y="39216458"/>
-            <a:ext cx="2649600" cy="1440000"/>
+            <a:off x="17064000" y="38161243"/>
+            <a:ext cx="2649600" cy="1296000"/>
           </a:xfrm>
           <a:prstGeom prst="roundRect">
             <a:avLst>
@@ -9186,7 +9186,7 @@
         </p:nvSpPr>
         <p:spPr>
           <a:xfrm>
-            <a:off x="17064000" y="39396458"/>
+            <a:off x="17064000" y="38269243"/>
             <a:ext cx="2649600" cy="792000"/>
           </a:xfrm>
           <a:prstGeom prst="rect">
@@ -9225,7 +9225,7 @@
         </p:nvSpPr>
         <p:spPr>
           <a:xfrm>
-            <a:off x="17064000" y="40080458"/>
+            <a:off x="17064000" y="38953243"/>
             <a:ext cx="2649600" cy="576000"/>
           </a:xfrm>
           <a:prstGeom prst="rect">
@@ -9264,8 +9264,8 @@
         </p:nvSpPr>
         <p:spPr>
           <a:xfrm>
-            <a:off x="20001600" y="39216458"/>
-            <a:ext cx="2649600" cy="1440000"/>
+            <a:off x="20001600" y="38161243"/>
+            <a:ext cx="2649600" cy="1296000"/>
           </a:xfrm>
           <a:prstGeom prst="roundRect">
             <a:avLst>
@@ -9310,7 +9310,7 @@
         </p:nvSpPr>
         <p:spPr>
           <a:xfrm>
-            <a:off x="20001600" y="39396458"/>
+            <a:off x="20001600" y="38269243"/>
             <a:ext cx="2649600" cy="792000"/>
           </a:xfrm>
           <a:prstGeom prst="rect">
@@ -9349,7 +9349,7 @@
         </p:nvSpPr>
         <p:spPr>
           <a:xfrm>
-            <a:off x="20001600" y="40080458"/>
+            <a:off x="20001600" y="38953243"/>
             <a:ext cx="2649600" cy="576000"/>
           </a:xfrm>
           <a:prstGeom prst="rect">
@@ -9388,8 +9388,8 @@
         </p:nvSpPr>
         <p:spPr>
           <a:xfrm>
-            <a:off x="22939200" y="39216458"/>
-            <a:ext cx="2649600" cy="1440000"/>
+            <a:off x="22939200" y="38161243"/>
+            <a:ext cx="2649600" cy="1296000"/>
           </a:xfrm>
           <a:prstGeom prst="roundRect">
             <a:avLst>
@@ -9434,7 +9434,7 @@
         </p:nvSpPr>
         <p:spPr>
           <a:xfrm>
-            <a:off x="22939200" y="39396458"/>
+            <a:off x="22939200" y="38269243"/>
             <a:ext cx="2649600" cy="792000"/>
           </a:xfrm>
           <a:prstGeom prst="rect">
@@ -9473,7 +9473,7 @@
         </p:nvSpPr>
         <p:spPr>
           <a:xfrm>
-            <a:off x="22939200" y="40080458"/>
+            <a:off x="22939200" y="38953243"/>
             <a:ext cx="2649600" cy="576000"/>
           </a:xfrm>
           <a:prstGeom prst="rect">
@@ -9512,8 +9512,8 @@
         </p:nvSpPr>
         <p:spPr>
           <a:xfrm>
-            <a:off x="25876800" y="39216458"/>
-            <a:ext cx="2649600" cy="1440000"/>
+            <a:off x="25876800" y="38161243"/>
+            <a:ext cx="2649600" cy="1296000"/>
           </a:xfrm>
           <a:prstGeom prst="roundRect">
             <a:avLst>
@@ -9558,7 +9558,7 @@
         </p:nvSpPr>
         <p:spPr>
           <a:xfrm>
-            <a:off x="25876800" y="39396458"/>
+            <a:off x="25876800" y="38269243"/>
             <a:ext cx="2649600" cy="792000"/>
           </a:xfrm>
           <a:prstGeom prst="rect">
@@ -9597,7 +9597,7 @@
         </p:nvSpPr>
         <p:spPr>
           <a:xfrm>
-            <a:off x="25876800" y="40080458"/>
+            <a:off x="25876800" y="38953243"/>
             <a:ext cx="2649600" cy="576000"/>
           </a:xfrm>
           <a:prstGeom prst="rect">
@@ -9636,8 +9636,8 @@
         </p:nvSpPr>
         <p:spPr>
           <a:xfrm>
-            <a:off x="28814400" y="39216458"/>
-            <a:ext cx="2649600" cy="1440000"/>
+            <a:off x="28814400" y="38161243"/>
+            <a:ext cx="2649600" cy="1296000"/>
           </a:xfrm>
           <a:prstGeom prst="roundRect">
             <a:avLst>
@@ -9682,7 +9682,7 @@
         </p:nvSpPr>
         <p:spPr>
           <a:xfrm>
-            <a:off x="28814400" y="39396458"/>
+            <a:off x="28814400" y="38269243"/>
             <a:ext cx="2649600" cy="792000"/>
           </a:xfrm>
           <a:prstGeom prst="rect">
@@ -9721,7 +9721,7 @@
         </p:nvSpPr>
         <p:spPr>
           <a:xfrm>
-            <a:off x="28814400" y="40080458"/>
+            <a:off x="28814400" y="38953243"/>
             <a:ext cx="2649600" cy="576000"/>
           </a:xfrm>
           <a:prstGeom prst="rect">
@@ -9760,7 +9760,55 @@
         </p:nvSpPr>
         <p:spPr>
           <a:xfrm>
-            <a:off x="17064000" y="40728458"/>
+            <a:off x="17064000" y="39529243"/>
+            <a:ext cx="14400000" cy="1036424"/>
+          </a:xfrm>
+          <a:prstGeom prst="rect">
+            <a:avLst/>
+          </a:prstGeom>
+          <a:noFill/>
+        </p:spPr>
+        <p:txBody>
+          <a:bodyPr wrap="square" lIns="0" rIns="0" tIns="0" bIns="0">
+            <a:spAutoFit/>
+          </a:bodyPr>
+          <a:lstStyle/>
+          <a:p>
+            <a:pPr algn="l">
+              <a:lnSpc>
+                <a:spcPct val="124000"/>
+              </a:lnSpc>
+            </a:pPr>
+            <a:r>
+              <a:rPr sz="2196" b="1">
+                <a:solidFill>
+                  <a:srgbClr val="003670"/>
+                </a:solidFill>
+                <a:latin typeface="맑은 고딕"/>
+              </a:rPr>
+              <a:t>세무 신고기한도 같이 챙긴다. </a:t>
+            </a:r>
+            <a:r>
+              <a:rPr sz="2196" b="0">
+                <a:solidFill>
+                  <a:srgbClr val="2B2B2B"/>
+                </a:solidFill>
+                <a:latin typeface="맑은 고딕"/>
+              </a:rPr>
+              <a:t>프로필 네 값(사업자 형태·과세유형·직원·원천세 주기)으로 18개 항목 중 해당분만 계산해, D-7·D-3·D-1 에 인앱과 카카오톡으로 알린다.</a:t>
+            </a:r>
+          </a:p>
+        </p:txBody>
+      </p:sp>
+      <p:sp>
+        <p:nvSpPr>
+          <p:cNvPr id="150" name="TextBox 149"/>
+          <p:cNvSpPr txBox="1"/>
+          <p:nvPr/>
+        </p:nvSpPr>
+        <p:spPr>
+          <a:xfrm>
+            <a:off x="17064000" y="40745667"/>
             <a:ext cx="14400000" cy="307088"/>
           </a:xfrm>
           <a:prstGeom prst="rect">
@@ -9786,7 +9834,7 @@
                 </a:solidFill>
                 <a:latin typeface="맑은 고딕"/>
               </a:rPr>
-              <a:t>카카오 로그인 없이도 전부 쓸 수 있다  ·  기기 저장이 원본, 서버는 통로</a:t>
+              <a:t>카카오 로그인 없이도 전부 쓸 수 있다  ·  숫자는 모두 2026-09-11 실측</a:t>
             </a:r>
           </a:p>
         </p:txBody>
